--- a/assets/templates/MS3L_presentation_template.pptx
+++ b/assets/templates/MS3L_presentation_template.pptx
@@ -3196,7 +3196,7 @@
                 <a:solidFill>
                   <a:srgbClr val="FFFFFF"/>
                 </a:solidFill>
-                <a:latin typeface="Inter"/>
+                <a:latin typeface="Noto Sans KR"/>
               </a:rPr>
               <a:t>Presentation title goes here</a:t>
             </a:r>
@@ -3231,7 +3231,7 @@
                 <a:solidFill>
                   <a:srgbClr val="D8EFF6"/>
                 </a:solidFill>
-                <a:latin typeface="Inter"/>
+                <a:latin typeface="Noto Sans KR"/>
               </a:rPr>
               <a:t>Jihoon Kim  |  Korea Research Institute of Chemical Technology</a:t>
             </a:r>
@@ -3266,7 +3266,7 @@
                 <a:solidFill>
                   <a:srgbClr val="B2E2E0"/>
                 </a:solidFill>
-                <a:latin typeface="Inter"/>
+                <a:latin typeface="Noto Sans KR"/>
               </a:rPr>
               <a:t>Conference / Date</a:t>
             </a:r>
@@ -3413,7 +3413,7 @@
                 <a:solidFill>
                   <a:srgbClr val="089892"/>
                 </a:solidFill>
-                <a:latin typeface="Inter"/>
+                <a:latin typeface="Noto Sans KR"/>
               </a:rPr>
               <a:t>01</a:t>
             </a:r>
@@ -3448,7 +3448,7 @@
                 <a:solidFill>
                   <a:srgbClr val="0B2F5B"/>
                 </a:solidFill>
-                <a:latin typeface="Inter"/>
+                <a:latin typeface="Noto Sans KR"/>
               </a:rPr>
               <a:t>Section title</a:t>
             </a:r>
@@ -3670,7 +3670,7 @@
                 <a:solidFill>
                   <a:srgbClr val="0B2F5B"/>
                 </a:solidFill>
-                <a:latin typeface="Inter"/>
+                <a:latin typeface="Noto Sans KR"/>
               </a:rPr>
               <a:t>Slide title</a:t>
             </a:r>
@@ -3756,7 +3756,7 @@
                 <a:solidFill>
                   <a:srgbClr val="005CA5"/>
                 </a:solidFill>
-                <a:latin typeface="Inter"/>
+                <a:latin typeface="Noto Sans KR"/>
               </a:rPr>
               <a:t>Lead line for the slide, one sentence.</a:t>
             </a:r>
@@ -3834,7 +3834,7 @@
                 <a:solidFill>
                   <a:srgbClr val="0B2F5B"/>
                 </a:solidFill>
-                <a:latin typeface="Inter"/>
+                <a:latin typeface="Noto Sans KR"/>
               </a:rPr>
               <a:t>Point one</a:t>
             </a:r>
@@ -3869,7 +3869,7 @@
                 <a:solidFill>
                   <a:srgbClr val="5B6F84"/>
                 </a:solidFill>
-                <a:latin typeface="Inter"/>
+                <a:latin typeface="Noto Sans KR"/>
               </a:rPr>
               <a:t>Supporting detail for the first point.</a:t>
             </a:r>
@@ -3947,7 +3947,7 @@
                 <a:solidFill>
                   <a:srgbClr val="0B2F5B"/>
                 </a:solidFill>
-                <a:latin typeface="Inter"/>
+                <a:latin typeface="Noto Sans KR"/>
               </a:rPr>
               <a:t>Point two</a:t>
             </a:r>
@@ -3982,7 +3982,7 @@
                 <a:solidFill>
                   <a:srgbClr val="5B6F84"/>
                 </a:solidFill>
-                <a:latin typeface="Inter"/>
+                <a:latin typeface="Noto Sans KR"/>
               </a:rPr>
               <a:t>Supporting detail for the second point.</a:t>
             </a:r>
@@ -4060,7 +4060,7 @@
                 <a:solidFill>
                   <a:srgbClr val="0B2F5B"/>
                 </a:solidFill>
-                <a:latin typeface="Inter"/>
+                <a:latin typeface="Noto Sans KR"/>
               </a:rPr>
               <a:t>Point three</a:t>
             </a:r>
@@ -4095,7 +4095,7 @@
                 <a:solidFill>
                   <a:srgbClr val="5B6F84"/>
                 </a:solidFill>
-                <a:latin typeface="Inter"/>
+                <a:latin typeface="Noto Sans KR"/>
               </a:rPr>
               <a:t>Supporting detail for the third point.</a:t>
             </a:r>
@@ -4266,7 +4266,7 @@
                 <a:solidFill>
                   <a:srgbClr val="0B2F5B"/>
                 </a:solidFill>
-                <a:latin typeface="Inter"/>
+                <a:latin typeface="Noto Sans KR"/>
               </a:rPr>
               <a:t>Two-column layout</a:t>
             </a:r>
@@ -4446,7 +4446,7 @@
                 <a:solidFill>
                   <a:srgbClr val="0B2F5B"/>
                 </a:solidFill>
-                <a:latin typeface="Inter"/>
+                <a:latin typeface="Noto Sans KR"/>
               </a:rPr>
               <a:t>Left column</a:t>
             </a:r>
@@ -4481,7 +4481,7 @@
                 <a:solidFill>
                   <a:srgbClr val="5B6F84"/>
                 </a:solidFill>
-                <a:latin typeface="Inter"/>
+                <a:latin typeface="Noto Sans KR"/>
               </a:rPr>
               <a:t>Body text. Replace with figure, table or bullets.</a:t>
             </a:r>
@@ -4610,7 +4610,7 @@
                 <a:solidFill>
                   <a:srgbClr val="0B2F5B"/>
                 </a:solidFill>
-                <a:latin typeface="Inter"/>
+                <a:latin typeface="Noto Sans KR"/>
               </a:rPr>
               <a:t>Right column</a:t>
             </a:r>
@@ -4645,7 +4645,7 @@
                 <a:solidFill>
                   <a:srgbClr val="5B6F84"/>
                 </a:solidFill>
-                <a:latin typeface="Inter"/>
+                <a:latin typeface="Noto Sans KR"/>
               </a:rPr>
               <a:t>Body text. Replace with figure, table or bullets.</a:t>
             </a:r>
@@ -4816,7 +4816,7 @@
                 <a:solidFill>
                   <a:srgbClr val="0B2F5B"/>
                 </a:solidFill>
-                <a:latin typeface="Inter"/>
+                <a:latin typeface="Noto Sans KR"/>
               </a:rPr>
               <a:t>Figure</a:t>
             </a:r>
@@ -4947,7 +4947,7 @@
                 <a:solidFill>
                   <a:srgbClr val="9AAEC2"/>
                 </a:solidFill>
-                <a:latin typeface="Inter"/>
+                <a:latin typeface="Noto Sans KR"/>
               </a:rPr>
               <a:t>Place figure here</a:t>
             </a:r>
@@ -4982,7 +4982,7 @@
                 <a:solidFill>
                   <a:srgbClr val="5B6F84"/>
                 </a:solidFill>
-                <a:latin typeface="Inter"/>
+                <a:latin typeface="Noto Sans KR"/>
               </a:rPr>
               <a:t>Figure 1. Caption.</a:t>
             </a:r>
@@ -5110,7 +5110,7 @@
                 <a:solidFill>
                   <a:srgbClr val="FFFFFF"/>
                 </a:solidFill>
-                <a:latin typeface="Inter"/>
+                <a:latin typeface="Noto Sans KR"/>
               </a:rPr>
               <a:t>Thank you</a:t>
             </a:r>
@@ -5145,7 +5145,7 @@
                 <a:solidFill>
                   <a:srgbClr val="D8EFF6"/>
                 </a:solidFill>
-                <a:latin typeface="Inter"/>
+                <a:latin typeface="Noto Sans KR"/>
               </a:rPr>
               <a:t>jh.kim@krict.re.kr</a:t>
             </a:r>
@@ -5180,7 +5180,7 @@
                 <a:solidFill>
                   <a:srgbClr val="B2E2E0"/>
                 </a:solidFill>
-                <a:latin typeface="Inter"/>
+                <a:latin typeface="Noto Sans KR"/>
               </a:rPr>
               <a:t>https://enthusiast87.github.io/MS3L.io/</a:t>
             </a:r>

--- a/assets/templates/MS3L_presentation_template.pptx
+++ b/assets/templates/MS3L_presentation_template.pptx
@@ -3110,10 +3110,10 @@
           <a:gradFill rotWithShape="1">
             <a:gsLst>
               <a:gs pos="0">
-                <a:srgbClr val="005CA5"/>
+                <a:srgbClr val="0075C2"/>
               </a:gs>
               <a:gs pos="100000">
-                <a:srgbClr val="089892"/>
+                <a:srgbClr val="00ADA9"/>
               </a:gs>
             </a:gsLst>
             <a:lin scaled="0" ang="2700000"/>
@@ -3351,10 +3351,10 @@
           <a:gradFill rotWithShape="1">
             <a:gsLst>
               <a:gs pos="0">
-                <a:srgbClr val="005CA5"/>
+                <a:srgbClr val="0075C2"/>
               </a:gs>
               <a:gs pos="100000">
-                <a:srgbClr val="089892"/>
+                <a:srgbClr val="00ADA9"/>
               </a:gs>
             </a:gsLst>
             <a:lin scaled="0" ang="5400000"/>
@@ -3411,7 +3411,7 @@
             <a:r>
               <a:rPr sz="1800" b="1">
                 <a:solidFill>
-                  <a:srgbClr val="089892"/>
+                  <a:srgbClr val="00ADA9"/>
                 </a:solidFill>
                 <a:latin typeface="Noto Sans KR"/>
               </a:rPr>
@@ -3472,10 +3472,10 @@
           <a:gradFill rotWithShape="1">
             <a:gsLst>
               <a:gs pos="0">
-                <a:srgbClr val="005CA5"/>
+                <a:srgbClr val="0075C2"/>
               </a:gs>
               <a:gs pos="100000">
-                <a:srgbClr val="089892"/>
+                <a:srgbClr val="00ADA9"/>
               </a:gs>
             </a:gsLst>
             <a:lin scaled="0" ang="0"/>
@@ -3608,10 +3608,10 @@
           <a:gradFill rotWithShape="1">
             <a:gsLst>
               <a:gs pos="0">
-                <a:srgbClr val="005CA5"/>
+                <a:srgbClr val="0075C2"/>
               </a:gs>
               <a:gs pos="100000">
-                <a:srgbClr val="089892"/>
+                <a:srgbClr val="00ADA9"/>
               </a:gs>
             </a:gsLst>
             <a:lin scaled="0" ang="0"/>
@@ -3694,10 +3694,10 @@
           <a:gradFill rotWithShape="1">
             <a:gsLst>
               <a:gs pos="0">
-                <a:srgbClr val="005CA5"/>
+                <a:srgbClr val="0075C2"/>
               </a:gs>
               <a:gs pos="100000">
-                <a:srgbClr val="089892"/>
+                <a:srgbClr val="00ADA9"/>
               </a:gs>
             </a:gsLst>
             <a:lin scaled="0" ang="0"/>
@@ -3754,7 +3754,7 @@
             <a:r>
               <a:rPr sz="1700" b="0">
                 <a:solidFill>
-                  <a:srgbClr val="005CA5"/>
+                  <a:srgbClr val="0075C2"/>
                 </a:solidFill>
                 <a:latin typeface="Noto Sans KR"/>
               </a:rPr>
@@ -3778,7 +3778,7 @@
             <a:avLst/>
           </a:prstGeom>
           <a:solidFill>
-            <a:srgbClr val="089892"/>
+            <a:srgbClr val="00ADA9"/>
           </a:solidFill>
           <a:ln>
             <a:noFill/>
@@ -3891,7 +3891,7 @@
             <a:avLst/>
           </a:prstGeom>
           <a:solidFill>
-            <a:srgbClr val="089892"/>
+            <a:srgbClr val="00ADA9"/>
           </a:solidFill>
           <a:ln>
             <a:noFill/>
@@ -4004,7 +4004,7 @@
             <a:avLst/>
           </a:prstGeom>
           <a:solidFill>
-            <a:srgbClr val="089892"/>
+            <a:srgbClr val="00ADA9"/>
           </a:solidFill>
           <a:ln>
             <a:noFill/>
@@ -4204,10 +4204,10 @@
           <a:gradFill rotWithShape="1">
             <a:gsLst>
               <a:gs pos="0">
-                <a:srgbClr val="005CA5"/>
+                <a:srgbClr val="0075C2"/>
               </a:gs>
               <a:gs pos="100000">
-                <a:srgbClr val="089892"/>
+                <a:srgbClr val="00ADA9"/>
               </a:gs>
             </a:gsLst>
             <a:lin scaled="0" ang="0"/>
@@ -4290,10 +4290,10 @@
           <a:gradFill rotWithShape="1">
             <a:gsLst>
               <a:gs pos="0">
-                <a:srgbClr val="005CA5"/>
+                <a:srgbClr val="0075C2"/>
               </a:gs>
               <a:gs pos="100000">
-                <a:srgbClr val="089892"/>
+                <a:srgbClr val="00ADA9"/>
               </a:gs>
             </a:gsLst>
             <a:lin scaled="0" ang="0"/>
@@ -4339,7 +4339,7 @@
             <a:avLst/>
           </a:prstGeom>
           <a:solidFill>
-            <a:srgbClr val="F4F8FC"/>
+            <a:srgbClr val="F4F8FD"/>
           </a:solidFill>
           <a:ln>
             <a:noFill/>
@@ -4384,10 +4384,10 @@
           <a:gradFill rotWithShape="1">
             <a:gsLst>
               <a:gs pos="0">
-                <a:srgbClr val="005CA5"/>
+                <a:srgbClr val="0075C2"/>
               </a:gs>
               <a:gs pos="100000">
-                <a:srgbClr val="089892"/>
+                <a:srgbClr val="00ADA9"/>
               </a:gs>
             </a:gsLst>
             <a:lin scaled="0" ang="5400000"/>
@@ -4503,7 +4503,7 @@
             <a:avLst/>
           </a:prstGeom>
           <a:solidFill>
-            <a:srgbClr val="F4F8FC"/>
+            <a:srgbClr val="F4F8FD"/>
           </a:solidFill>
           <a:ln>
             <a:noFill/>
@@ -4548,10 +4548,10 @@
           <a:gradFill rotWithShape="1">
             <a:gsLst>
               <a:gs pos="0">
-                <a:srgbClr val="005CA5"/>
+                <a:srgbClr val="0075C2"/>
               </a:gs>
               <a:gs pos="100000">
-                <a:srgbClr val="089892"/>
+                <a:srgbClr val="00ADA9"/>
               </a:gs>
             </a:gsLst>
             <a:lin scaled="0" ang="5400000"/>
@@ -4754,10 +4754,10 @@
           <a:gradFill rotWithShape="1">
             <a:gsLst>
               <a:gs pos="0">
-                <a:srgbClr val="005CA5"/>
+                <a:srgbClr val="0075C2"/>
               </a:gs>
               <a:gs pos="100000">
-                <a:srgbClr val="089892"/>
+                <a:srgbClr val="00ADA9"/>
               </a:gs>
             </a:gsLst>
             <a:lin scaled="0" ang="0"/>
@@ -4840,10 +4840,10 @@
           <a:gradFill rotWithShape="1">
             <a:gsLst>
               <a:gs pos="0">
-                <a:srgbClr val="005CA5"/>
+                <a:srgbClr val="0075C2"/>
               </a:gs>
               <a:gs pos="100000">
-                <a:srgbClr val="089892"/>
+                <a:srgbClr val="00ADA9"/>
               </a:gs>
             </a:gsLst>
             <a:lin scaled="0" ang="0"/>
@@ -4889,7 +4889,7 @@
             <a:avLst/>
           </a:prstGeom>
           <a:solidFill>
-            <a:srgbClr val="F4F8FC"/>
+            <a:srgbClr val="F4F8FD"/>
           </a:solidFill>
           <a:ln w="12700">
             <a:solidFill>
@@ -5024,10 +5024,10 @@
           <a:gradFill rotWithShape="1">
             <a:gsLst>
               <a:gs pos="0">
-                <a:srgbClr val="005CA5"/>
+                <a:srgbClr val="0075C2"/>
               </a:gs>
               <a:gs pos="100000">
-                <a:srgbClr val="089892"/>
+                <a:srgbClr val="00ADA9"/>
               </a:gs>
             </a:gsLst>
             <a:lin scaled="0" ang="2700000"/>
@@ -5182,7 +5182,7 @@
                 </a:solidFill>
                 <a:latin typeface="Noto Sans KR"/>
               </a:rPr>
-              <a:t>https://enthusiast87.github.io/MS3L.io/</a:t>
+              <a:t>https://ms3l.org</a:t>
             </a:r>
           </a:p>
         </p:txBody>

--- a/assets/templates/MS3L_presentation_template.pptx
+++ b/assets/templates/MS3L_presentation_template.pptx
@@ -3093,16 +3093,64 @@
         <p:nvPr/>
       </p:nvGrpSpPr>
       <p:grpSpPr/>
-      <p:sp>
-        <p:nvSpPr>
-          <p:cNvPr id="2" name="Rectangle 1"/>
+      <p:pic>
+        <p:nvPicPr>
+          <p:cNvPr id="2" name="Picture 1" descr="ms3l-lockup-horizontal.png"/>
+          <p:cNvPicPr>
+            <a:picLocks noChangeAspect="1"/>
+          </p:cNvPicPr>
+          <p:nvPr/>
+        </p:nvPicPr>
+        <p:blipFill>
+          <a:blip r:embed="rId2"/>
+          <a:stretch>
+            <a:fillRect/>
+          </a:stretch>
+        </p:blipFill>
+        <p:spPr>
+          <a:xfrm>
+            <a:off x="566928" y="502920"/>
+            <a:ext cx="4206240" cy="726532"/>
+          </a:xfrm>
+          <a:prstGeom prst="rect">
+            <a:avLst/>
+          </a:prstGeom>
+        </p:spPr>
+      </p:pic>
+      <p:pic>
+        <p:nvPicPr>
+          <p:cNvPr id="3" name="Picture 2" descr="krict-logo.png"/>
+          <p:cNvPicPr>
+            <a:picLocks noChangeAspect="1"/>
+          </p:cNvPicPr>
+          <p:nvPr/>
+        </p:nvPicPr>
+        <p:blipFill>
+          <a:blip r:embed="rId3"/>
+          <a:stretch>
+            <a:fillRect/>
+          </a:stretch>
+        </p:blipFill>
+        <p:spPr>
+          <a:xfrm>
+            <a:off x="10271455" y="566928"/>
+            <a:ext cx="1158079" cy="365760"/>
+          </a:xfrm>
+          <a:prstGeom prst="rect">
+            <a:avLst/>
+          </a:prstGeom>
+        </p:spPr>
+      </p:pic>
+      <p:sp>
+        <p:nvSpPr>
+          <p:cNvPr id="4" name="Rectangle 3"/>
           <p:cNvSpPr/>
           <p:nvPr/>
         </p:nvSpPr>
         <p:spPr>
           <a:xfrm>
-            <a:off x="0" y="0"/>
-            <a:ext cx="12191695" cy="6858000"/>
+            <a:off x="566928" y="1481328"/>
+            <a:ext cx="11057839" cy="41148"/>
           </a:xfrm>
           <a:prstGeom prst="rect">
             <a:avLst/>
@@ -3116,7 +3164,7 @@
                 <a:srgbClr val="00ADA9"/>
               </a:gs>
             </a:gsLst>
-            <a:lin scaled="0" ang="2700000"/>
+            <a:lin scaled="0" ang="0"/>
           </a:gradFill>
           <a:ln>
             <a:noFill/>
@@ -3144,40 +3192,16 @@
           </a:p>
         </p:txBody>
       </p:sp>
-      <p:pic>
-        <p:nvPicPr>
-          <p:cNvPr id="3" name="Picture 2" descr="ms3l-lockup-horizontal-white.png"/>
-          <p:cNvPicPr>
-            <a:picLocks noChangeAspect="1"/>
-          </p:cNvPicPr>
-          <p:nvPr/>
-        </p:nvPicPr>
-        <p:blipFill>
-          <a:blip r:embed="rId2"/>
-          <a:stretch>
-            <a:fillRect/>
-          </a:stretch>
-        </p:blipFill>
-        <p:spPr>
-          <a:xfrm>
-            <a:off x="914400" y="1965960"/>
-            <a:ext cx="8046720" cy="1389888"/>
-          </a:xfrm>
-          <a:prstGeom prst="rect">
-            <a:avLst/>
-          </a:prstGeom>
-        </p:spPr>
-      </p:pic>
-      <p:sp>
-        <p:nvSpPr>
-          <p:cNvPr id="4" name="TextBox 3"/>
+      <p:sp>
+        <p:nvSpPr>
+          <p:cNvPr id="5" name="TextBox 4"/>
           <p:cNvSpPr txBox="1"/>
           <p:nvPr/>
         </p:nvSpPr>
         <p:spPr>
           <a:xfrm>
-            <a:off x="960120" y="3977639"/>
-            <a:ext cx="9144000" cy="548640"/>
+            <a:off x="566928" y="2395728"/>
+            <a:ext cx="11057839" cy="1188720"/>
           </a:xfrm>
           <a:prstGeom prst="rect">
             <a:avLst/>
@@ -3190,29 +3214,33 @@
           </a:bodyPr>
           <a:lstStyle/>
           <a:p>
-            <a:pPr algn="l"/>
-            <a:r>
-              <a:rPr sz="3000" b="1">
-                <a:solidFill>
-                  <a:srgbClr val="FFFFFF"/>
-                </a:solidFill>
-                <a:latin typeface="Noto Sans KR"/>
+            <a:pPr algn="ctr">
+              <a:lnSpc>
+                <a:spcPct val="100000"/>
+              </a:lnSpc>
+            </a:pPr>
+            <a:r>
+              <a:rPr sz="4600" b="1">
+                <a:solidFill>
+                  <a:srgbClr val="0B2F5B"/>
+                </a:solidFill>
+                <a:latin typeface="Arial"/>
               </a:rPr>
-              <a:t>Presentation title goes here</a:t>
-            </a:r>
-          </a:p>
-        </p:txBody>
-      </p:sp>
-      <p:sp>
-        <p:nvSpPr>
-          <p:cNvPr id="5" name="TextBox 4"/>
+              <a:t>Title</a:t>
+            </a:r>
+          </a:p>
+        </p:txBody>
+      </p:sp>
+      <p:sp>
+        <p:nvSpPr>
+          <p:cNvPr id="6" name="TextBox 5"/>
           <p:cNvSpPr txBox="1"/>
           <p:nvPr/>
         </p:nvSpPr>
         <p:spPr>
           <a:xfrm>
-            <a:off x="960120" y="4617720"/>
-            <a:ext cx="9144000" cy="457200"/>
+            <a:off x="566928" y="3584448"/>
+            <a:ext cx="11057839" cy="640080"/>
           </a:xfrm>
           <a:prstGeom prst="rect">
             <a:avLst/>
@@ -3225,29 +3253,84 @@
           </a:bodyPr>
           <a:lstStyle/>
           <a:p>
-            <a:pPr algn="l"/>
-            <a:r>
-              <a:rPr sz="1500" b="0">
-                <a:solidFill>
-                  <a:srgbClr val="D8EFF6"/>
-                </a:solidFill>
-                <a:latin typeface="Noto Sans KR"/>
+            <a:pPr algn="ctr">
+              <a:lnSpc>
+                <a:spcPct val="100000"/>
+              </a:lnSpc>
+            </a:pPr>
+            <a:r>
+              <a:rPr sz="2600" b="0">
+                <a:solidFill>
+                  <a:srgbClr val="0075C2"/>
+                </a:solidFill>
+                <a:latin typeface="Arial"/>
               </a:rPr>
-              <a:t>Jihoon Kim  |  Korea Research Institute of Chemical Technology</a:t>
-            </a:r>
-          </a:p>
-        </p:txBody>
-      </p:sp>
-      <p:sp>
-        <p:nvSpPr>
-          <p:cNvPr id="6" name="TextBox 5"/>
+              <a:t>Sub-title</a:t>
+            </a:r>
+          </a:p>
+        </p:txBody>
+      </p:sp>
+      <p:sp>
+        <p:nvSpPr>
+          <p:cNvPr id="7" name="Rectangle 6"/>
+          <p:cNvSpPr/>
+          <p:nvPr/>
+        </p:nvSpPr>
+        <p:spPr>
+          <a:xfrm>
+            <a:off x="5413248" y="4443984"/>
+            <a:ext cx="1371600" cy="41148"/>
+          </a:xfrm>
+          <a:prstGeom prst="rect">
+            <a:avLst/>
+          </a:prstGeom>
+          <a:gradFill rotWithShape="1">
+            <a:gsLst>
+              <a:gs pos="0">
+                <a:srgbClr val="0075C2"/>
+              </a:gs>
+              <a:gs pos="100000">
+                <a:srgbClr val="00ADA9"/>
+              </a:gs>
+            </a:gsLst>
+            <a:lin scaled="0" ang="0"/>
+          </a:gradFill>
+          <a:ln>
+            <a:noFill/>
+          </a:ln>
+        </p:spPr>
+        <p:style>
+          <a:lnRef idx="1">
+            <a:schemeClr val="accent1"/>
+          </a:lnRef>
+          <a:fillRef idx="3">
+            <a:schemeClr val="accent1"/>
+          </a:fillRef>
+          <a:effectRef idx="2">
+            <a:schemeClr val="accent1"/>
+          </a:effectRef>
+          <a:fontRef idx="minor">
+            <a:schemeClr val="lt1"/>
+          </a:fontRef>
+        </p:style>
+        <p:txBody>
+          <a:bodyPr rtlCol="0" anchor="ctr"/>
+          <a:lstStyle/>
+          <a:p>
+            <a:pPr algn="ctr"/>
+          </a:p>
+        </p:txBody>
+      </p:sp>
+      <p:sp>
+        <p:nvSpPr>
+          <p:cNvPr id="8" name="TextBox 7"/>
           <p:cNvSpPr txBox="1"/>
           <p:nvPr/>
         </p:nvSpPr>
         <p:spPr>
           <a:xfrm>
-            <a:off x="960120" y="5029200"/>
-            <a:ext cx="9144000" cy="365760"/>
+            <a:off x="566928" y="4956048"/>
+            <a:ext cx="11057839" cy="457200"/>
           </a:xfrm>
           <a:prstGeom prst="rect">
             <a:avLst/>
@@ -3260,15 +3343,97 @@
           </a:bodyPr>
           <a:lstStyle/>
           <a:p>
-            <a:pPr algn="l"/>
+            <a:pPr algn="ctr">
+              <a:lnSpc>
+                <a:spcPct val="100000"/>
+              </a:lnSpc>
+            </a:pPr>
+            <a:r>
+              <a:rPr sz="1800" b="1">
+                <a:solidFill>
+                  <a:srgbClr val="0B2F5B"/>
+                </a:solidFill>
+                <a:latin typeface="Arial"/>
+              </a:rPr>
+              <a:t>Name</a:t>
+            </a:r>
+          </a:p>
+        </p:txBody>
+      </p:sp>
+      <p:sp>
+        <p:nvSpPr>
+          <p:cNvPr id="9" name="TextBox 8"/>
+          <p:cNvSpPr txBox="1"/>
+          <p:nvPr/>
+        </p:nvSpPr>
+        <p:spPr>
+          <a:xfrm>
+            <a:off x="566928" y="5358384"/>
+            <a:ext cx="11057839" cy="457200"/>
+          </a:xfrm>
+          <a:prstGeom prst="rect">
+            <a:avLst/>
+          </a:prstGeom>
+          <a:noFill/>
+        </p:spPr>
+        <p:txBody>
+          <a:bodyPr wrap="square" lIns="0" rIns="0" tIns="0" bIns="0">
+            <a:spAutoFit/>
+          </a:bodyPr>
+          <a:lstStyle/>
+          <a:p>
+            <a:pPr algn="ctr">
+              <a:lnSpc>
+                <a:spcPct val="100000"/>
+              </a:lnSpc>
+            </a:pPr>
+            <a:r>
+              <a:rPr sz="1400" b="0">
+                <a:solidFill>
+                  <a:srgbClr val="5B6F84"/>
+                </a:solidFill>
+                <a:latin typeface="Arial"/>
+              </a:rPr>
+              <a:t>Membrane-based Sustainable Separation Solutions Laboratory, KRICT</a:t>
+            </a:r>
+          </a:p>
+        </p:txBody>
+      </p:sp>
+      <p:sp>
+        <p:nvSpPr>
+          <p:cNvPr id="10" name="TextBox 9"/>
+          <p:cNvSpPr txBox="1"/>
+          <p:nvPr/>
+        </p:nvSpPr>
+        <p:spPr>
+          <a:xfrm>
+            <a:off x="566928" y="5705856"/>
+            <a:ext cx="11057839" cy="365760"/>
+          </a:xfrm>
+          <a:prstGeom prst="rect">
+            <a:avLst/>
+          </a:prstGeom>
+          <a:noFill/>
+        </p:spPr>
+        <p:txBody>
+          <a:bodyPr wrap="square" lIns="0" rIns="0" tIns="0" bIns="0">
+            <a:spAutoFit/>
+          </a:bodyPr>
+          <a:lstStyle/>
+          <a:p>
+            <a:pPr algn="ctr">
+              <a:lnSpc>
+                <a:spcPct val="100000"/>
+              </a:lnSpc>
+            </a:pPr>
             <a:r>
               <a:rPr sz="1300" b="0">
                 <a:solidFill>
-                  <a:srgbClr val="B2E2E0"/>
-                </a:solidFill>
-                <a:latin typeface="Noto Sans KR"/>
+                  <a:srgbClr val="5B6F84"/>
+                </a:solidFill>
+                <a:latin typeface="Arial"/>
               </a:rPr>
-              <a:t>Conference / Date</a:t>
+              <a:t>2026.00.00.</a:t>
             </a:r>
           </a:p>
         </p:txBody>
@@ -3291,22 +3456,46 @@
         <p:nvPr/>
       </p:nvGrpSpPr>
       <p:grpSpPr/>
-      <p:sp>
-        <p:nvSpPr>
-          <p:cNvPr id="2" name="Rectangle 1"/>
+      <p:pic>
+        <p:nvPicPr>
+          <p:cNvPr id="2" name="Picture 1" descr="ms3l-avatar-circle.png"/>
+          <p:cNvPicPr>
+            <a:picLocks noChangeAspect="1"/>
+          </p:cNvPicPr>
+          <p:nvPr/>
+        </p:nvPicPr>
+        <p:blipFill>
+          <a:blip r:embed="rId2"/>
+          <a:stretch>
+            <a:fillRect/>
+          </a:stretch>
+        </p:blipFill>
+        <p:spPr>
+          <a:xfrm>
+            <a:off x="10618927" y="219456"/>
+            <a:ext cx="384048" cy="384048"/>
+          </a:xfrm>
+          <a:prstGeom prst="rect">
+            <a:avLst/>
+          </a:prstGeom>
+        </p:spPr>
+      </p:pic>
+      <p:sp>
+        <p:nvSpPr>
+          <p:cNvPr id="3" name="Rectangle 2"/>
           <p:cNvSpPr/>
           <p:nvPr/>
         </p:nvSpPr>
         <p:spPr>
           <a:xfrm>
-            <a:off x="0" y="0"/>
-            <a:ext cx="12191695" cy="6858000"/>
+            <a:off x="11103559" y="256032"/>
+            <a:ext cx="9144" cy="310896"/>
           </a:xfrm>
           <a:prstGeom prst="rect">
             <a:avLst/>
           </a:prstGeom>
           <a:solidFill>
-            <a:srgbClr val="FFFFFF"/>
+            <a:srgbClr val="D6E2EE"/>
           </a:solidFill>
           <a:ln>
             <a:noFill/>
@@ -3334,16 +3523,79 @@
           </a:p>
         </p:txBody>
       </p:sp>
-      <p:sp>
-        <p:nvSpPr>
-          <p:cNvPr id="3" name="Rectangle 2"/>
+      <p:pic>
+        <p:nvPicPr>
+          <p:cNvPr id="4" name="Picture 3" descr="krict-logo.png"/>
+          <p:cNvPicPr>
+            <a:picLocks noChangeAspect="1"/>
+          </p:cNvPicPr>
+          <p:nvPr/>
+        </p:nvPicPr>
+        <p:blipFill>
+          <a:blip r:embed="rId3"/>
+          <a:stretch>
+            <a:fillRect/>
+          </a:stretch>
+        </p:blipFill>
+        <p:spPr>
+          <a:xfrm>
+            <a:off x="11185855" y="292608"/>
+            <a:ext cx="752751" cy="237744"/>
+          </a:xfrm>
+          <a:prstGeom prst="rect">
+            <a:avLst/>
+          </a:prstGeom>
+        </p:spPr>
+      </p:pic>
+      <p:sp>
+        <p:nvSpPr>
+          <p:cNvPr id="5" name="TextBox 4"/>
+          <p:cNvSpPr txBox="1"/>
+          <p:nvPr/>
+        </p:nvSpPr>
+        <p:spPr>
+          <a:xfrm>
+            <a:off x="566928" y="182880"/>
+            <a:ext cx="8595360" cy="548640"/>
+          </a:xfrm>
+          <a:prstGeom prst="rect">
+            <a:avLst/>
+          </a:prstGeom>
+          <a:noFill/>
+        </p:spPr>
+        <p:txBody>
+          <a:bodyPr wrap="square" lIns="0" rIns="0" tIns="0" bIns="0">
+            <a:spAutoFit/>
+          </a:bodyPr>
+          <a:lstStyle/>
+          <a:p>
+            <a:pPr algn="l">
+              <a:lnSpc>
+                <a:spcPct val="100000"/>
+              </a:lnSpc>
+            </a:pPr>
+            <a:r>
+              <a:rPr sz="2800" b="1">
+                <a:solidFill>
+                  <a:srgbClr val="0075C2"/>
+                </a:solidFill>
+                <a:latin typeface="Arial"/>
+              </a:rPr>
+              <a:t>Outline</a:t>
+            </a:r>
+          </a:p>
+        </p:txBody>
+      </p:sp>
+      <p:sp>
+        <p:nvSpPr>
+          <p:cNvPr id="6" name="Rectangle 5"/>
           <p:cNvSpPr/>
           <p:nvPr/>
         </p:nvSpPr>
         <p:spPr>
           <a:xfrm>
-            <a:off x="0" y="0"/>
-            <a:ext cx="384048" cy="6858000"/>
+            <a:off x="566928" y="749808"/>
+            <a:ext cx="11057839" cy="32004"/>
           </a:xfrm>
           <a:prstGeom prst="rect">
             <a:avLst/>
@@ -3357,7 +3609,7 @@
                 <a:srgbClr val="00ADA9"/>
               </a:gs>
             </a:gsLst>
-            <a:lin scaled="0" ang="5400000"/>
+            <a:lin scaled="0" ang="0"/>
           </a:gradFill>
           <a:ln>
             <a:noFill/>
@@ -3387,14 +3639,14 @@
       </p:sp>
       <p:sp>
         <p:nvSpPr>
-          <p:cNvPr id="4" name="TextBox 3"/>
+          <p:cNvPr id="7" name="TextBox 6"/>
           <p:cNvSpPr txBox="1"/>
           <p:nvPr/>
         </p:nvSpPr>
         <p:spPr>
           <a:xfrm>
-            <a:off x="1188720" y="2743200"/>
-            <a:ext cx="8229600" cy="457200"/>
+            <a:off x="11002975" y="6382512"/>
+            <a:ext cx="640080" cy="274320"/>
           </a:xfrm>
           <a:prstGeom prst="rect">
             <a:avLst/>
@@ -3407,29 +3659,33 @@
           </a:bodyPr>
           <a:lstStyle/>
           <a:p>
-            <a:pPr algn="l"/>
-            <a:r>
-              <a:rPr sz="1800" b="1">
-                <a:solidFill>
-                  <a:srgbClr val="00ADA9"/>
-                </a:solidFill>
-                <a:latin typeface="Noto Sans KR"/>
+            <a:pPr algn="r">
+              <a:lnSpc>
+                <a:spcPct val="100000"/>
+              </a:lnSpc>
+            </a:pPr>
+            <a:r>
+              <a:rPr sz="1200" b="0">
+                <a:solidFill>
+                  <a:srgbClr val="5B6F84"/>
+                </a:solidFill>
+                <a:latin typeface="Arial"/>
               </a:rPr>
-              <a:t>01</a:t>
-            </a:r>
-          </a:p>
-        </p:txBody>
-      </p:sp>
-      <p:sp>
-        <p:nvSpPr>
-          <p:cNvPr id="5" name="TextBox 4"/>
+              <a:t>2</a:t>
+            </a:r>
+          </a:p>
+        </p:txBody>
+      </p:sp>
+      <p:sp>
+        <p:nvSpPr>
+          <p:cNvPr id="8" name="TextBox 7"/>
           <p:cNvSpPr txBox="1"/>
           <p:nvPr/>
         </p:nvSpPr>
         <p:spPr>
           <a:xfrm>
-            <a:off x="1188720" y="3154680"/>
-            <a:ext cx="9144000" cy="914400"/>
+            <a:off x="621792" y="1280160"/>
+            <a:ext cx="292608" cy="310896"/>
           </a:xfrm>
           <a:prstGeom prst="rect">
             <a:avLst/>
@@ -3442,94 +3698,218 @@
           </a:bodyPr>
           <a:lstStyle/>
           <a:p>
-            <a:pPr algn="l"/>
-            <a:r>
-              <a:rPr sz="4400" b="1">
+            <a:pPr algn="l">
+              <a:lnSpc>
+                <a:spcPct val="100000"/>
+              </a:lnSpc>
+            </a:pPr>
+            <a:r>
+              <a:rPr sz="1800" b="1">
+                <a:solidFill>
+                  <a:srgbClr val="00ADA9"/>
+                </a:solidFill>
+                <a:latin typeface="Arial"/>
+              </a:rPr>
+              <a:t>✓</a:t>
+            </a:r>
+          </a:p>
+        </p:txBody>
+      </p:sp>
+      <p:sp>
+        <p:nvSpPr>
+          <p:cNvPr id="9" name="TextBox 8"/>
+          <p:cNvSpPr txBox="1"/>
+          <p:nvPr/>
+        </p:nvSpPr>
+        <p:spPr>
+          <a:xfrm>
+            <a:off x="932688" y="1280160"/>
+            <a:ext cx="10607040" cy="310896"/>
+          </a:xfrm>
+          <a:prstGeom prst="rect">
+            <a:avLst/>
+          </a:prstGeom>
+          <a:noFill/>
+        </p:spPr>
+        <p:txBody>
+          <a:bodyPr wrap="square" lIns="0" rIns="0" tIns="0" bIns="0">
+            <a:spAutoFit/>
+          </a:bodyPr>
+          <a:lstStyle/>
+          <a:p>
+            <a:pPr algn="l">
+              <a:lnSpc>
+                <a:spcPct val="100000"/>
+              </a:lnSpc>
+            </a:pPr>
+            <a:r>
+              <a:rPr sz="1800" b="1">
                 <a:solidFill>
                   <a:srgbClr val="0B2F5B"/>
                 </a:solidFill>
-                <a:latin typeface="Noto Sans KR"/>
+                <a:latin typeface="Arial"/>
               </a:rPr>
-              <a:t>Section title</a:t>
-            </a:r>
-          </a:p>
-        </p:txBody>
-      </p:sp>
-      <p:sp>
-        <p:nvSpPr>
-          <p:cNvPr id="6" name="Rectangle 5"/>
-          <p:cNvSpPr/>
-          <p:nvPr/>
-        </p:nvSpPr>
-        <p:spPr>
-          <a:xfrm>
-            <a:off x="1188720" y="4251960"/>
-            <a:ext cx="2011680" cy="82296"/>
-          </a:xfrm>
-          <a:prstGeom prst="rect">
-            <a:avLst/>
-          </a:prstGeom>
-          <a:gradFill rotWithShape="1">
-            <a:gsLst>
-              <a:gs pos="0">
-                <a:srgbClr val="0075C2"/>
-              </a:gs>
-              <a:gs pos="100000">
-                <a:srgbClr val="00ADA9"/>
-              </a:gs>
-            </a:gsLst>
-            <a:lin scaled="0" ang="0"/>
-          </a:gradFill>
-          <a:ln>
-            <a:noFill/>
-          </a:ln>
-        </p:spPr>
-        <p:style>
-          <a:lnRef idx="1">
-            <a:schemeClr val="accent1"/>
-          </a:lnRef>
-          <a:fillRef idx="3">
-            <a:schemeClr val="accent1"/>
-          </a:fillRef>
-          <a:effectRef idx="2">
-            <a:schemeClr val="accent1"/>
-          </a:effectRef>
-          <a:fontRef idx="minor">
-            <a:schemeClr val="lt1"/>
-          </a:fontRef>
-        </p:style>
-        <p:txBody>
-          <a:bodyPr rtlCol="0" anchor="ctr"/>
-          <a:lstStyle/>
-          <a:p>
-            <a:pPr algn="ctr"/>
-          </a:p>
-        </p:txBody>
-      </p:sp>
-      <p:pic>
-        <p:nvPicPr>
-          <p:cNvPr id="7" name="Picture 6" descr="ms3l-avatar-circle.png"/>
-          <p:cNvPicPr>
-            <a:picLocks noChangeAspect="1"/>
-          </p:cNvPicPr>
-          <p:nvPr/>
-        </p:nvPicPr>
-        <p:blipFill>
-          <a:blip r:embed="rId2"/>
-          <a:stretch>
-            <a:fillRect/>
-          </a:stretch>
-        </p:blipFill>
-        <p:spPr>
-          <a:xfrm>
-            <a:off x="10515600" y="5349240"/>
-            <a:ext cx="868680" cy="868680"/>
-          </a:xfrm>
-          <a:prstGeom prst="rect">
-            <a:avLst/>
-          </a:prstGeom>
-        </p:spPr>
-      </p:pic>
+              <a:t>Content #1</a:t>
+            </a:r>
+          </a:p>
+        </p:txBody>
+      </p:sp>
+      <p:sp>
+        <p:nvSpPr>
+          <p:cNvPr id="10" name="TextBox 9"/>
+          <p:cNvSpPr txBox="1"/>
+          <p:nvPr/>
+        </p:nvSpPr>
+        <p:spPr>
+          <a:xfrm>
+            <a:off x="621792" y="1993392"/>
+            <a:ext cx="292608" cy="310896"/>
+          </a:xfrm>
+          <a:prstGeom prst="rect">
+            <a:avLst/>
+          </a:prstGeom>
+          <a:noFill/>
+        </p:spPr>
+        <p:txBody>
+          <a:bodyPr wrap="square" lIns="0" rIns="0" tIns="0" bIns="0">
+            <a:spAutoFit/>
+          </a:bodyPr>
+          <a:lstStyle/>
+          <a:p>
+            <a:pPr algn="l">
+              <a:lnSpc>
+                <a:spcPct val="100000"/>
+              </a:lnSpc>
+            </a:pPr>
+            <a:r>
+              <a:rPr sz="1800" b="1">
+                <a:solidFill>
+                  <a:srgbClr val="00ADA9"/>
+                </a:solidFill>
+                <a:latin typeface="Arial"/>
+              </a:rPr>
+              <a:t>✓</a:t>
+            </a:r>
+          </a:p>
+        </p:txBody>
+      </p:sp>
+      <p:sp>
+        <p:nvSpPr>
+          <p:cNvPr id="11" name="TextBox 10"/>
+          <p:cNvSpPr txBox="1"/>
+          <p:nvPr/>
+        </p:nvSpPr>
+        <p:spPr>
+          <a:xfrm>
+            <a:off x="932688" y="1993392"/>
+            <a:ext cx="10607040" cy="310896"/>
+          </a:xfrm>
+          <a:prstGeom prst="rect">
+            <a:avLst/>
+          </a:prstGeom>
+          <a:noFill/>
+        </p:spPr>
+        <p:txBody>
+          <a:bodyPr wrap="square" lIns="0" rIns="0" tIns="0" bIns="0">
+            <a:spAutoFit/>
+          </a:bodyPr>
+          <a:lstStyle/>
+          <a:p>
+            <a:pPr algn="l">
+              <a:lnSpc>
+                <a:spcPct val="100000"/>
+              </a:lnSpc>
+            </a:pPr>
+            <a:r>
+              <a:rPr sz="1800" b="1">
+                <a:solidFill>
+                  <a:srgbClr val="0B2F5B"/>
+                </a:solidFill>
+                <a:latin typeface="Arial"/>
+              </a:rPr>
+              <a:t>Content #2</a:t>
+            </a:r>
+          </a:p>
+        </p:txBody>
+      </p:sp>
+      <p:sp>
+        <p:nvSpPr>
+          <p:cNvPr id="12" name="TextBox 11"/>
+          <p:cNvSpPr txBox="1"/>
+          <p:nvPr/>
+        </p:nvSpPr>
+        <p:spPr>
+          <a:xfrm>
+            <a:off x="621792" y="2706624"/>
+            <a:ext cx="292608" cy="310896"/>
+          </a:xfrm>
+          <a:prstGeom prst="rect">
+            <a:avLst/>
+          </a:prstGeom>
+          <a:noFill/>
+        </p:spPr>
+        <p:txBody>
+          <a:bodyPr wrap="square" lIns="0" rIns="0" tIns="0" bIns="0">
+            <a:spAutoFit/>
+          </a:bodyPr>
+          <a:lstStyle/>
+          <a:p>
+            <a:pPr algn="l">
+              <a:lnSpc>
+                <a:spcPct val="100000"/>
+              </a:lnSpc>
+            </a:pPr>
+            <a:r>
+              <a:rPr sz="1800" b="1">
+                <a:solidFill>
+                  <a:srgbClr val="00ADA9"/>
+                </a:solidFill>
+                <a:latin typeface="Arial"/>
+              </a:rPr>
+              <a:t>✓</a:t>
+            </a:r>
+          </a:p>
+        </p:txBody>
+      </p:sp>
+      <p:sp>
+        <p:nvSpPr>
+          <p:cNvPr id="13" name="TextBox 12"/>
+          <p:cNvSpPr txBox="1"/>
+          <p:nvPr/>
+        </p:nvSpPr>
+        <p:spPr>
+          <a:xfrm>
+            <a:off x="932688" y="2706624"/>
+            <a:ext cx="10607040" cy="310896"/>
+          </a:xfrm>
+          <a:prstGeom prst="rect">
+            <a:avLst/>
+          </a:prstGeom>
+          <a:noFill/>
+        </p:spPr>
+        <p:txBody>
+          <a:bodyPr wrap="square" lIns="0" rIns="0" tIns="0" bIns="0">
+            <a:spAutoFit/>
+          </a:bodyPr>
+          <a:lstStyle/>
+          <a:p>
+            <a:pPr algn="l">
+              <a:lnSpc>
+                <a:spcPct val="100000"/>
+              </a:lnSpc>
+            </a:pPr>
+            <a:r>
+              <a:rPr sz="1800" b="1">
+                <a:solidFill>
+                  <a:srgbClr val="0B2F5B"/>
+                </a:solidFill>
+                <a:latin typeface="Arial"/>
+              </a:rPr>
+              <a:t>Content #3</a:t>
+            </a:r>
+          </a:p>
+        </p:txBody>
+      </p:sp>
     </p:spTree>
   </p:cSld>
   <p:clrMapOvr>
@@ -3548,22 +3928,46 @@
         <p:nvPr/>
       </p:nvGrpSpPr>
       <p:grpSpPr/>
-      <p:sp>
-        <p:nvSpPr>
-          <p:cNvPr id="2" name="Rectangle 1"/>
+      <p:pic>
+        <p:nvPicPr>
+          <p:cNvPr id="2" name="Picture 1" descr="ms3l-avatar-circle.png"/>
+          <p:cNvPicPr>
+            <a:picLocks noChangeAspect="1"/>
+          </p:cNvPicPr>
+          <p:nvPr/>
+        </p:nvPicPr>
+        <p:blipFill>
+          <a:blip r:embed="rId2"/>
+          <a:stretch>
+            <a:fillRect/>
+          </a:stretch>
+        </p:blipFill>
+        <p:spPr>
+          <a:xfrm>
+            <a:off x="10618927" y="219456"/>
+            <a:ext cx="384048" cy="384048"/>
+          </a:xfrm>
+          <a:prstGeom prst="rect">
+            <a:avLst/>
+          </a:prstGeom>
+        </p:spPr>
+      </p:pic>
+      <p:sp>
+        <p:nvSpPr>
+          <p:cNvPr id="3" name="Rectangle 2"/>
           <p:cNvSpPr/>
           <p:nvPr/>
         </p:nvSpPr>
         <p:spPr>
           <a:xfrm>
-            <a:off x="0" y="0"/>
-            <a:ext cx="12191695" cy="6858000"/>
+            <a:off x="11103559" y="256032"/>
+            <a:ext cx="9144" cy="310896"/>
           </a:xfrm>
           <a:prstGeom prst="rect">
             <a:avLst/>
           </a:prstGeom>
           <a:solidFill>
-            <a:srgbClr val="FFFFFF"/>
+            <a:srgbClr val="D6E2EE"/>
           </a:solidFill>
           <a:ln>
             <a:noFill/>
@@ -3591,16 +3995,79 @@
           </a:p>
         </p:txBody>
       </p:sp>
-      <p:sp>
-        <p:nvSpPr>
-          <p:cNvPr id="3" name="Rectangle 2"/>
+      <p:pic>
+        <p:nvPicPr>
+          <p:cNvPr id="4" name="Picture 3" descr="krict-logo.png"/>
+          <p:cNvPicPr>
+            <a:picLocks noChangeAspect="1"/>
+          </p:cNvPicPr>
+          <p:nvPr/>
+        </p:nvPicPr>
+        <p:blipFill>
+          <a:blip r:embed="rId3"/>
+          <a:stretch>
+            <a:fillRect/>
+          </a:stretch>
+        </p:blipFill>
+        <p:spPr>
+          <a:xfrm>
+            <a:off x="11185855" y="292608"/>
+            <a:ext cx="752751" cy="237744"/>
+          </a:xfrm>
+          <a:prstGeom prst="rect">
+            <a:avLst/>
+          </a:prstGeom>
+        </p:spPr>
+      </p:pic>
+      <p:sp>
+        <p:nvSpPr>
+          <p:cNvPr id="5" name="TextBox 4"/>
+          <p:cNvSpPr txBox="1"/>
+          <p:nvPr/>
+        </p:nvSpPr>
+        <p:spPr>
+          <a:xfrm>
+            <a:off x="566928" y="182880"/>
+            <a:ext cx="8595360" cy="548640"/>
+          </a:xfrm>
+          <a:prstGeom prst="rect">
+            <a:avLst/>
+          </a:prstGeom>
+          <a:noFill/>
+        </p:spPr>
+        <p:txBody>
+          <a:bodyPr wrap="square" lIns="0" rIns="0" tIns="0" bIns="0">
+            <a:spAutoFit/>
+          </a:bodyPr>
+          <a:lstStyle/>
+          <a:p>
+            <a:pPr algn="l">
+              <a:lnSpc>
+                <a:spcPct val="100000"/>
+              </a:lnSpc>
+            </a:pPr>
+            <a:r>
+              <a:rPr sz="2800" b="1">
+                <a:solidFill>
+                  <a:srgbClr val="0075C2"/>
+                </a:solidFill>
+                <a:latin typeface="Arial"/>
+              </a:rPr>
+              <a:t>Content #1</a:t>
+            </a:r>
+          </a:p>
+        </p:txBody>
+      </p:sp>
+      <p:sp>
+        <p:nvSpPr>
+          <p:cNvPr id="6" name="Rectangle 5"/>
           <p:cNvSpPr/>
           <p:nvPr/>
         </p:nvSpPr>
         <p:spPr>
           <a:xfrm>
-            <a:off x="0" y="0"/>
-            <a:ext cx="12191695" cy="100584"/>
+            <a:off x="566928" y="749808"/>
+            <a:ext cx="11057839" cy="32004"/>
           </a:xfrm>
           <a:prstGeom prst="rect">
             <a:avLst/>
@@ -3644,14 +4111,14 @@
       </p:sp>
       <p:sp>
         <p:nvSpPr>
-          <p:cNvPr id="4" name="TextBox 3"/>
+          <p:cNvPr id="7" name="TextBox 6"/>
           <p:cNvSpPr txBox="1"/>
           <p:nvPr/>
         </p:nvSpPr>
         <p:spPr>
           <a:xfrm>
-            <a:off x="822960" y="566928"/>
-            <a:ext cx="10058400" cy="640080"/>
+            <a:off x="11002975" y="6382512"/>
+            <a:ext cx="640080" cy="274320"/>
           </a:xfrm>
           <a:prstGeom prst="rect">
             <a:avLst/>
@@ -3664,80 +4131,33 @@
           </a:bodyPr>
           <a:lstStyle/>
           <a:p>
-            <a:pPr algn="l"/>
-            <a:r>
-              <a:rPr sz="3000" b="1">
-                <a:solidFill>
-                  <a:srgbClr val="0B2F5B"/>
-                </a:solidFill>
-                <a:latin typeface="Noto Sans KR"/>
+            <a:pPr algn="r">
+              <a:lnSpc>
+                <a:spcPct val="100000"/>
+              </a:lnSpc>
+            </a:pPr>
+            <a:r>
+              <a:rPr sz="1200" b="0">
+                <a:solidFill>
+                  <a:srgbClr val="5B6F84"/>
+                </a:solidFill>
+                <a:latin typeface="Arial"/>
               </a:rPr>
-              <a:t>Slide title</a:t>
-            </a:r>
-          </a:p>
-        </p:txBody>
-      </p:sp>
-      <p:sp>
-        <p:nvSpPr>
-          <p:cNvPr id="5" name="Rectangle 4"/>
-          <p:cNvSpPr/>
-          <p:nvPr/>
-        </p:nvSpPr>
-        <p:spPr>
-          <a:xfrm>
-            <a:off x="822960" y="1207008"/>
-            <a:ext cx="1371600" cy="54864"/>
-          </a:xfrm>
-          <a:prstGeom prst="rect">
-            <a:avLst/>
-          </a:prstGeom>
-          <a:gradFill rotWithShape="1">
-            <a:gsLst>
-              <a:gs pos="0">
-                <a:srgbClr val="0075C2"/>
-              </a:gs>
-              <a:gs pos="100000">
-                <a:srgbClr val="00ADA9"/>
-              </a:gs>
-            </a:gsLst>
-            <a:lin scaled="0" ang="0"/>
-          </a:gradFill>
-          <a:ln>
-            <a:noFill/>
-          </a:ln>
-        </p:spPr>
-        <p:style>
-          <a:lnRef idx="1">
-            <a:schemeClr val="accent1"/>
-          </a:lnRef>
-          <a:fillRef idx="3">
-            <a:schemeClr val="accent1"/>
-          </a:fillRef>
-          <a:effectRef idx="2">
-            <a:schemeClr val="accent1"/>
-          </a:effectRef>
-          <a:fontRef idx="minor">
-            <a:schemeClr val="lt1"/>
-          </a:fontRef>
-        </p:style>
-        <p:txBody>
-          <a:bodyPr rtlCol="0" anchor="ctr"/>
-          <a:lstStyle/>
-          <a:p>
-            <a:pPr algn="ctr"/>
-          </a:p>
-        </p:txBody>
-      </p:sp>
-      <p:sp>
-        <p:nvSpPr>
-          <p:cNvPr id="6" name="TextBox 5"/>
+              <a:t>3</a:t>
+            </a:r>
+          </a:p>
+        </p:txBody>
+      </p:sp>
+      <p:sp>
+        <p:nvSpPr>
+          <p:cNvPr id="8" name="TextBox 7"/>
           <p:cNvSpPr txBox="1"/>
           <p:nvPr/>
         </p:nvSpPr>
         <p:spPr>
           <a:xfrm>
-            <a:off x="822960" y="1600200"/>
-            <a:ext cx="10515600" cy="457200"/>
+            <a:off x="566928" y="932688"/>
+            <a:ext cx="10607040" cy="365760"/>
           </a:xfrm>
           <a:prstGeom prst="rect">
             <a:avLst/>
@@ -3750,72 +4170,33 @@
           </a:bodyPr>
           <a:lstStyle/>
           <a:p>
-            <a:pPr algn="l"/>
-            <a:r>
-              <a:rPr sz="1700" b="0">
+            <a:pPr algn="l">
+              <a:lnSpc>
+                <a:spcPct val="100000"/>
+              </a:lnSpc>
+            </a:pPr>
+            <a:r>
+              <a:rPr sz="1500" b="1">
                 <a:solidFill>
                   <a:srgbClr val="0075C2"/>
                 </a:solidFill>
-                <a:latin typeface="Noto Sans KR"/>
+                <a:latin typeface="Arial"/>
               </a:rPr>
-              <a:t>Lead line for the slide, one sentence.</a:t>
-            </a:r>
-          </a:p>
-        </p:txBody>
-      </p:sp>
-      <p:sp>
-        <p:nvSpPr>
-          <p:cNvPr id="7" name="Oval 6"/>
-          <p:cNvSpPr/>
-          <p:nvPr/>
-        </p:nvSpPr>
-        <p:spPr>
-          <a:xfrm>
-            <a:off x="822960" y="2395728"/>
-            <a:ext cx="146304" cy="146304"/>
-          </a:xfrm>
-          <a:prstGeom prst="ellipse">
-            <a:avLst/>
-          </a:prstGeom>
-          <a:solidFill>
-            <a:srgbClr val="00ADA9"/>
-          </a:solidFill>
-          <a:ln>
-            <a:noFill/>
-          </a:ln>
-        </p:spPr>
-        <p:style>
-          <a:lnRef idx="1">
-            <a:schemeClr val="accent1"/>
-          </a:lnRef>
-          <a:fillRef idx="3">
-            <a:schemeClr val="accent1"/>
-          </a:fillRef>
-          <a:effectRef idx="2">
-            <a:schemeClr val="accent1"/>
-          </a:effectRef>
-          <a:fontRef idx="minor">
-            <a:schemeClr val="lt1"/>
-          </a:fontRef>
-        </p:style>
-        <p:txBody>
-          <a:bodyPr rtlCol="0" anchor="ctr"/>
-          <a:lstStyle/>
-          <a:p>
-            <a:pPr algn="ctr"/>
-          </a:p>
-        </p:txBody>
-      </p:sp>
-      <p:sp>
-        <p:nvSpPr>
-          <p:cNvPr id="8" name="TextBox 7"/>
+              <a:t>Subjective</a:t>
+            </a:r>
+          </a:p>
+        </p:txBody>
+      </p:sp>
+      <p:sp>
+        <p:nvSpPr>
+          <p:cNvPr id="9" name="TextBox 8"/>
           <p:cNvSpPr txBox="1"/>
           <p:nvPr/>
         </p:nvSpPr>
         <p:spPr>
           <a:xfrm>
-            <a:off x="1188720" y="2331720"/>
-            <a:ext cx="9601200" cy="365760"/>
+            <a:off x="621792" y="1444752"/>
+            <a:ext cx="292608" cy="310896"/>
           </a:xfrm>
           <a:prstGeom prst="rect">
             <a:avLst/>
@@ -3828,29 +4209,33 @@
           </a:bodyPr>
           <a:lstStyle/>
           <a:p>
-            <a:pPr algn="l"/>
-            <a:r>
-              <a:rPr sz="1800" b="1">
-                <a:solidFill>
-                  <a:srgbClr val="0B2F5B"/>
-                </a:solidFill>
-                <a:latin typeface="Noto Sans KR"/>
+            <a:pPr algn="l">
+              <a:lnSpc>
+                <a:spcPct val="100000"/>
+              </a:lnSpc>
+            </a:pPr>
+            <a:r>
+              <a:rPr sz="1500" b="1">
+                <a:solidFill>
+                  <a:srgbClr val="00ADA9"/>
+                </a:solidFill>
+                <a:latin typeface="Arial"/>
               </a:rPr>
-              <a:t>Point one</a:t>
-            </a:r>
-          </a:p>
-        </p:txBody>
-      </p:sp>
-      <p:sp>
-        <p:nvSpPr>
-          <p:cNvPr id="9" name="TextBox 8"/>
+              <a:t>✓</a:t>
+            </a:r>
+          </a:p>
+        </p:txBody>
+      </p:sp>
+      <p:sp>
+        <p:nvSpPr>
+          <p:cNvPr id="10" name="TextBox 9"/>
           <p:cNvSpPr txBox="1"/>
           <p:nvPr/>
         </p:nvSpPr>
         <p:spPr>
           <a:xfrm>
-            <a:off x="1188720" y="2715768"/>
-            <a:ext cx="9601200" cy="457200"/>
+            <a:off x="932688" y="1444752"/>
+            <a:ext cx="10607040" cy="310896"/>
           </a:xfrm>
           <a:prstGeom prst="rect">
             <a:avLst/>
@@ -3863,59 +4248,20 @@
           </a:bodyPr>
           <a:lstStyle/>
           <a:p>
-            <a:pPr algn="l"/>
-            <a:r>
-              <a:rPr sz="1500" b="0">
-                <a:solidFill>
-                  <a:srgbClr val="5B6F84"/>
-                </a:solidFill>
-                <a:latin typeface="Noto Sans KR"/>
+            <a:pPr algn="l">
+              <a:lnSpc>
+                <a:spcPct val="100000"/>
+              </a:lnSpc>
+            </a:pPr>
+            <a:r>
+              <a:rPr sz="1500" b="1">
+                <a:solidFill>
+                  <a:srgbClr val="0B2F5B"/>
+                </a:solidFill>
+                <a:latin typeface="Arial"/>
               </a:rPr>
-              <a:t>Supporting detail for the first point.</a:t>
-            </a:r>
-          </a:p>
-        </p:txBody>
-      </p:sp>
-      <p:sp>
-        <p:nvSpPr>
-          <p:cNvPr id="10" name="Oval 9"/>
-          <p:cNvSpPr/>
-          <p:nvPr/>
-        </p:nvSpPr>
-        <p:spPr>
-          <a:xfrm>
-            <a:off x="822960" y="3447287"/>
-            <a:ext cx="146304" cy="146304"/>
-          </a:xfrm>
-          <a:prstGeom prst="ellipse">
-            <a:avLst/>
-          </a:prstGeom>
-          <a:solidFill>
-            <a:srgbClr val="00ADA9"/>
-          </a:solidFill>
-          <a:ln>
-            <a:noFill/>
-          </a:ln>
-        </p:spPr>
-        <p:style>
-          <a:lnRef idx="1">
-            <a:schemeClr val="accent1"/>
-          </a:lnRef>
-          <a:fillRef idx="3">
-            <a:schemeClr val="accent1"/>
-          </a:fillRef>
-          <a:effectRef idx="2">
-            <a:schemeClr val="accent1"/>
-          </a:effectRef>
-          <a:fontRef idx="minor">
-            <a:schemeClr val="lt1"/>
-          </a:fontRef>
-        </p:style>
-        <p:txBody>
-          <a:bodyPr rtlCol="0" anchor="ctr"/>
-          <a:lstStyle/>
-          <a:p>
-            <a:pPr algn="ctr"/>
+              <a:t>Point one</a:t>
+            </a:r>
           </a:p>
         </p:txBody>
       </p:sp>
@@ -3927,8 +4273,8 @@
         </p:nvSpPr>
         <p:spPr>
           <a:xfrm>
-            <a:off x="1188720" y="3383279"/>
-            <a:ext cx="9601200" cy="365760"/>
+            <a:off x="932688" y="1719072"/>
+            <a:ext cx="10607040" cy="292608"/>
           </a:xfrm>
           <a:prstGeom prst="rect">
             <a:avLst/>
@@ -3941,15 +4287,19 @@
           </a:bodyPr>
           <a:lstStyle/>
           <a:p>
-            <a:pPr algn="l"/>
-            <a:r>
-              <a:rPr sz="1800" b="1">
-                <a:solidFill>
-                  <a:srgbClr val="0B2F5B"/>
-                </a:solidFill>
-                <a:latin typeface="Noto Sans KR"/>
+            <a:pPr algn="l">
+              <a:lnSpc>
+                <a:spcPct val="100000"/>
+              </a:lnSpc>
+            </a:pPr>
+            <a:r>
+              <a:rPr sz="1300" b="0">
+                <a:solidFill>
+                  <a:srgbClr val="5B6F84"/>
+                </a:solidFill>
+                <a:latin typeface="Arial"/>
               </a:rPr>
-              <a:t>Point two</a:t>
+              <a:t>Supporting detail for the first point.</a:t>
             </a:r>
           </a:p>
         </p:txBody>
@@ -3962,8 +4312,8 @@
         </p:nvSpPr>
         <p:spPr>
           <a:xfrm>
-            <a:off x="1188720" y="3767327"/>
-            <a:ext cx="9601200" cy="457200"/>
+            <a:off x="621792" y="2048256"/>
+            <a:ext cx="292608" cy="310896"/>
           </a:xfrm>
           <a:prstGeom prst="rect">
             <a:avLst/>
@@ -3976,72 +4326,33 @@
           </a:bodyPr>
           <a:lstStyle/>
           <a:p>
-            <a:pPr algn="l"/>
-            <a:r>
-              <a:rPr sz="1500" b="0">
-                <a:solidFill>
-                  <a:srgbClr val="5B6F84"/>
-                </a:solidFill>
-                <a:latin typeface="Noto Sans KR"/>
+            <a:pPr algn="l">
+              <a:lnSpc>
+                <a:spcPct val="100000"/>
+              </a:lnSpc>
+            </a:pPr>
+            <a:r>
+              <a:rPr sz="1500" b="1">
+                <a:solidFill>
+                  <a:srgbClr val="00ADA9"/>
+                </a:solidFill>
+                <a:latin typeface="Arial"/>
               </a:rPr>
-              <a:t>Supporting detail for the second point.</a:t>
-            </a:r>
-          </a:p>
-        </p:txBody>
-      </p:sp>
-      <p:sp>
-        <p:nvSpPr>
-          <p:cNvPr id="13" name="Oval 12"/>
-          <p:cNvSpPr/>
-          <p:nvPr/>
-        </p:nvSpPr>
-        <p:spPr>
-          <a:xfrm>
-            <a:off x="822960" y="4498848"/>
-            <a:ext cx="146304" cy="146304"/>
-          </a:xfrm>
-          <a:prstGeom prst="ellipse">
-            <a:avLst/>
-          </a:prstGeom>
-          <a:solidFill>
-            <a:srgbClr val="00ADA9"/>
-          </a:solidFill>
-          <a:ln>
-            <a:noFill/>
-          </a:ln>
-        </p:spPr>
-        <p:style>
-          <a:lnRef idx="1">
-            <a:schemeClr val="accent1"/>
-          </a:lnRef>
-          <a:fillRef idx="3">
-            <a:schemeClr val="accent1"/>
-          </a:fillRef>
-          <a:effectRef idx="2">
-            <a:schemeClr val="accent1"/>
-          </a:effectRef>
-          <a:fontRef idx="minor">
-            <a:schemeClr val="lt1"/>
-          </a:fontRef>
-        </p:style>
-        <p:txBody>
-          <a:bodyPr rtlCol="0" anchor="ctr"/>
-          <a:lstStyle/>
-          <a:p>
-            <a:pPr algn="ctr"/>
-          </a:p>
-        </p:txBody>
-      </p:sp>
-      <p:sp>
-        <p:nvSpPr>
-          <p:cNvPr id="14" name="TextBox 13"/>
+              <a:t>✓</a:t>
+            </a:r>
+          </a:p>
+        </p:txBody>
+      </p:sp>
+      <p:sp>
+        <p:nvSpPr>
+          <p:cNvPr id="13" name="TextBox 12"/>
           <p:cNvSpPr txBox="1"/>
           <p:nvPr/>
         </p:nvSpPr>
         <p:spPr>
           <a:xfrm>
-            <a:off x="1188720" y="4434840"/>
-            <a:ext cx="9601200" cy="365760"/>
+            <a:off x="932688" y="2048256"/>
+            <a:ext cx="10607040" cy="310896"/>
           </a:xfrm>
           <a:prstGeom prst="rect">
             <a:avLst/>
@@ -4054,29 +4365,33 @@
           </a:bodyPr>
           <a:lstStyle/>
           <a:p>
-            <a:pPr algn="l"/>
-            <a:r>
-              <a:rPr sz="1800" b="1">
+            <a:pPr algn="l">
+              <a:lnSpc>
+                <a:spcPct val="100000"/>
+              </a:lnSpc>
+            </a:pPr>
+            <a:r>
+              <a:rPr sz="1500" b="1">
                 <a:solidFill>
                   <a:srgbClr val="0B2F5B"/>
                 </a:solidFill>
-                <a:latin typeface="Noto Sans KR"/>
+                <a:latin typeface="Arial"/>
               </a:rPr>
-              <a:t>Point three</a:t>
-            </a:r>
-          </a:p>
-        </p:txBody>
-      </p:sp>
-      <p:sp>
-        <p:nvSpPr>
-          <p:cNvPr id="15" name="TextBox 14"/>
+              <a:t>Point two</a:t>
+            </a:r>
+          </a:p>
+        </p:txBody>
+      </p:sp>
+      <p:sp>
+        <p:nvSpPr>
+          <p:cNvPr id="14" name="TextBox 13"/>
           <p:cNvSpPr txBox="1"/>
           <p:nvPr/>
         </p:nvSpPr>
         <p:spPr>
           <a:xfrm>
-            <a:off x="1188720" y="4818888"/>
-            <a:ext cx="9601200" cy="457200"/>
+            <a:off x="932688" y="2322576"/>
+            <a:ext cx="10607040" cy="292608"/>
           </a:xfrm>
           <a:prstGeom prst="rect">
             <a:avLst/>
@@ -4089,43 +4404,140 @@
           </a:bodyPr>
           <a:lstStyle/>
           <a:p>
-            <a:pPr algn="l"/>
-            <a:r>
-              <a:rPr sz="1500" b="0">
+            <a:pPr algn="l">
+              <a:lnSpc>
+                <a:spcPct val="100000"/>
+              </a:lnSpc>
+            </a:pPr>
+            <a:r>
+              <a:rPr sz="1300" b="0">
                 <a:solidFill>
                   <a:srgbClr val="5B6F84"/>
                 </a:solidFill>
-                <a:latin typeface="Noto Sans KR"/>
+                <a:latin typeface="Arial"/>
+              </a:rPr>
+              <a:t>Supporting detail for the second point.</a:t>
+            </a:r>
+          </a:p>
+        </p:txBody>
+      </p:sp>
+      <p:sp>
+        <p:nvSpPr>
+          <p:cNvPr id="15" name="TextBox 14"/>
+          <p:cNvSpPr txBox="1"/>
+          <p:nvPr/>
+        </p:nvSpPr>
+        <p:spPr>
+          <a:xfrm>
+            <a:off x="621792" y="2651760"/>
+            <a:ext cx="292608" cy="310896"/>
+          </a:xfrm>
+          <a:prstGeom prst="rect">
+            <a:avLst/>
+          </a:prstGeom>
+          <a:noFill/>
+        </p:spPr>
+        <p:txBody>
+          <a:bodyPr wrap="square" lIns="0" rIns="0" tIns="0" bIns="0">
+            <a:spAutoFit/>
+          </a:bodyPr>
+          <a:lstStyle/>
+          <a:p>
+            <a:pPr algn="l">
+              <a:lnSpc>
+                <a:spcPct val="100000"/>
+              </a:lnSpc>
+            </a:pPr>
+            <a:r>
+              <a:rPr sz="1500" b="1">
+                <a:solidFill>
+                  <a:srgbClr val="00ADA9"/>
+                </a:solidFill>
+                <a:latin typeface="Arial"/>
+              </a:rPr>
+              <a:t>✓</a:t>
+            </a:r>
+          </a:p>
+        </p:txBody>
+      </p:sp>
+      <p:sp>
+        <p:nvSpPr>
+          <p:cNvPr id="16" name="TextBox 15"/>
+          <p:cNvSpPr txBox="1"/>
+          <p:nvPr/>
+        </p:nvSpPr>
+        <p:spPr>
+          <a:xfrm>
+            <a:off x="932688" y="2651760"/>
+            <a:ext cx="10607040" cy="310896"/>
+          </a:xfrm>
+          <a:prstGeom prst="rect">
+            <a:avLst/>
+          </a:prstGeom>
+          <a:noFill/>
+        </p:spPr>
+        <p:txBody>
+          <a:bodyPr wrap="square" lIns="0" rIns="0" tIns="0" bIns="0">
+            <a:spAutoFit/>
+          </a:bodyPr>
+          <a:lstStyle/>
+          <a:p>
+            <a:pPr algn="l">
+              <a:lnSpc>
+                <a:spcPct val="100000"/>
+              </a:lnSpc>
+            </a:pPr>
+            <a:r>
+              <a:rPr sz="1500" b="1">
+                <a:solidFill>
+                  <a:srgbClr val="0B2F5B"/>
+                </a:solidFill>
+                <a:latin typeface="Arial"/>
+              </a:rPr>
+              <a:t>Point three</a:t>
+            </a:r>
+          </a:p>
+        </p:txBody>
+      </p:sp>
+      <p:sp>
+        <p:nvSpPr>
+          <p:cNvPr id="17" name="TextBox 16"/>
+          <p:cNvSpPr txBox="1"/>
+          <p:nvPr/>
+        </p:nvSpPr>
+        <p:spPr>
+          <a:xfrm>
+            <a:off x="932688" y="2926080"/>
+            <a:ext cx="10607040" cy="292608"/>
+          </a:xfrm>
+          <a:prstGeom prst="rect">
+            <a:avLst/>
+          </a:prstGeom>
+          <a:noFill/>
+        </p:spPr>
+        <p:txBody>
+          <a:bodyPr wrap="square" lIns="0" rIns="0" tIns="0" bIns="0">
+            <a:spAutoFit/>
+          </a:bodyPr>
+          <a:lstStyle/>
+          <a:p>
+            <a:pPr algn="l">
+              <a:lnSpc>
+                <a:spcPct val="100000"/>
+              </a:lnSpc>
+            </a:pPr>
+            <a:r>
+              <a:rPr sz="1300" b="0">
+                <a:solidFill>
+                  <a:srgbClr val="5B6F84"/>
+                </a:solidFill>
+                <a:latin typeface="Arial"/>
               </a:rPr>
               <a:t>Supporting detail for the third point.</a:t>
             </a:r>
           </a:p>
         </p:txBody>
       </p:sp>
-      <p:pic>
-        <p:nvPicPr>
-          <p:cNvPr id="16" name="Picture 15" descr="ms3l-avatar-circle.png"/>
-          <p:cNvPicPr>
-            <a:picLocks noChangeAspect="1"/>
-          </p:cNvPicPr>
-          <p:nvPr/>
-        </p:nvPicPr>
-        <p:blipFill>
-          <a:blip r:embed="rId2"/>
-          <a:stretch>
-            <a:fillRect/>
-          </a:stretch>
-        </p:blipFill>
-        <p:spPr>
-          <a:xfrm>
-            <a:off x="11356848" y="6053328"/>
-            <a:ext cx="438912" cy="438912"/>
-          </a:xfrm>
-          <a:prstGeom prst="rect">
-            <a:avLst/>
-          </a:prstGeom>
-        </p:spPr>
-      </p:pic>
     </p:spTree>
   </p:cSld>
   <p:clrMapOvr>
@@ -4144,22 +4556,46 @@
         <p:nvPr/>
       </p:nvGrpSpPr>
       <p:grpSpPr/>
-      <p:sp>
-        <p:nvSpPr>
-          <p:cNvPr id="2" name="Rectangle 1"/>
+      <p:pic>
+        <p:nvPicPr>
+          <p:cNvPr id="2" name="Picture 1" descr="ms3l-avatar-circle.png"/>
+          <p:cNvPicPr>
+            <a:picLocks noChangeAspect="1"/>
+          </p:cNvPicPr>
+          <p:nvPr/>
+        </p:nvPicPr>
+        <p:blipFill>
+          <a:blip r:embed="rId2"/>
+          <a:stretch>
+            <a:fillRect/>
+          </a:stretch>
+        </p:blipFill>
+        <p:spPr>
+          <a:xfrm>
+            <a:off x="10618927" y="219456"/>
+            <a:ext cx="384048" cy="384048"/>
+          </a:xfrm>
+          <a:prstGeom prst="rect">
+            <a:avLst/>
+          </a:prstGeom>
+        </p:spPr>
+      </p:pic>
+      <p:sp>
+        <p:nvSpPr>
+          <p:cNvPr id="3" name="Rectangle 2"/>
           <p:cNvSpPr/>
           <p:nvPr/>
         </p:nvSpPr>
         <p:spPr>
           <a:xfrm>
-            <a:off x="0" y="0"/>
-            <a:ext cx="12191695" cy="6858000"/>
+            <a:off x="11103559" y="256032"/>
+            <a:ext cx="9144" cy="310896"/>
           </a:xfrm>
           <a:prstGeom prst="rect">
             <a:avLst/>
           </a:prstGeom>
           <a:solidFill>
-            <a:srgbClr val="FFFFFF"/>
+            <a:srgbClr val="D6E2EE"/>
           </a:solidFill>
           <a:ln>
             <a:noFill/>
@@ -4187,16 +4623,79 @@
           </a:p>
         </p:txBody>
       </p:sp>
-      <p:sp>
-        <p:nvSpPr>
-          <p:cNvPr id="3" name="Rectangle 2"/>
+      <p:pic>
+        <p:nvPicPr>
+          <p:cNvPr id="4" name="Picture 3" descr="krict-logo.png"/>
+          <p:cNvPicPr>
+            <a:picLocks noChangeAspect="1"/>
+          </p:cNvPicPr>
+          <p:nvPr/>
+        </p:nvPicPr>
+        <p:blipFill>
+          <a:blip r:embed="rId3"/>
+          <a:stretch>
+            <a:fillRect/>
+          </a:stretch>
+        </p:blipFill>
+        <p:spPr>
+          <a:xfrm>
+            <a:off x="11185855" y="292608"/>
+            <a:ext cx="752751" cy="237744"/>
+          </a:xfrm>
+          <a:prstGeom prst="rect">
+            <a:avLst/>
+          </a:prstGeom>
+        </p:spPr>
+      </p:pic>
+      <p:sp>
+        <p:nvSpPr>
+          <p:cNvPr id="5" name="TextBox 4"/>
+          <p:cNvSpPr txBox="1"/>
+          <p:nvPr/>
+        </p:nvSpPr>
+        <p:spPr>
+          <a:xfrm>
+            <a:off x="566928" y="182880"/>
+            <a:ext cx="8595360" cy="548640"/>
+          </a:xfrm>
+          <a:prstGeom prst="rect">
+            <a:avLst/>
+          </a:prstGeom>
+          <a:noFill/>
+        </p:spPr>
+        <p:txBody>
+          <a:bodyPr wrap="square" lIns="0" rIns="0" tIns="0" bIns="0">
+            <a:spAutoFit/>
+          </a:bodyPr>
+          <a:lstStyle/>
+          <a:p>
+            <a:pPr algn="l">
+              <a:lnSpc>
+                <a:spcPct val="100000"/>
+              </a:lnSpc>
+            </a:pPr>
+            <a:r>
+              <a:rPr sz="2800" b="1">
+                <a:solidFill>
+                  <a:srgbClr val="0075C2"/>
+                </a:solidFill>
+                <a:latin typeface="Arial"/>
+              </a:rPr>
+              <a:t>Content #2</a:t>
+            </a:r>
+          </a:p>
+        </p:txBody>
+      </p:sp>
+      <p:sp>
+        <p:nvSpPr>
+          <p:cNvPr id="6" name="Rectangle 5"/>
           <p:cNvSpPr/>
           <p:nvPr/>
         </p:nvSpPr>
         <p:spPr>
           <a:xfrm>
-            <a:off x="0" y="0"/>
-            <a:ext cx="12191695" cy="100584"/>
+            <a:off x="566928" y="749808"/>
+            <a:ext cx="11057839" cy="32004"/>
           </a:xfrm>
           <a:prstGeom prst="rect">
             <a:avLst/>
@@ -4240,14 +4739,14 @@
       </p:sp>
       <p:sp>
         <p:nvSpPr>
-          <p:cNvPr id="4" name="TextBox 3"/>
+          <p:cNvPr id="7" name="TextBox 6"/>
           <p:cNvSpPr txBox="1"/>
           <p:nvPr/>
         </p:nvSpPr>
         <p:spPr>
           <a:xfrm>
-            <a:off x="822960" y="566928"/>
-            <a:ext cx="10058400" cy="640080"/>
+            <a:off x="11002975" y="6382512"/>
+            <a:ext cx="640080" cy="274320"/>
           </a:xfrm>
           <a:prstGeom prst="rect">
             <a:avLst/>
@@ -4260,46 +4759,83 @@
           </a:bodyPr>
           <a:lstStyle/>
           <a:p>
-            <a:pPr algn="l"/>
-            <a:r>
-              <a:rPr sz="3000" b="1">
-                <a:solidFill>
-                  <a:srgbClr val="0B2F5B"/>
-                </a:solidFill>
-                <a:latin typeface="Noto Sans KR"/>
+            <a:pPr algn="r">
+              <a:lnSpc>
+                <a:spcPct val="100000"/>
+              </a:lnSpc>
+            </a:pPr>
+            <a:r>
+              <a:rPr sz="1200" b="0">
+                <a:solidFill>
+                  <a:srgbClr val="5B6F84"/>
+                </a:solidFill>
+                <a:latin typeface="Arial"/>
               </a:rPr>
-              <a:t>Two-column layout</a:t>
-            </a:r>
-          </a:p>
-        </p:txBody>
-      </p:sp>
-      <p:sp>
-        <p:nvSpPr>
-          <p:cNvPr id="5" name="Rectangle 4"/>
+              <a:t>4</a:t>
+            </a:r>
+          </a:p>
+        </p:txBody>
+      </p:sp>
+      <p:sp>
+        <p:nvSpPr>
+          <p:cNvPr id="8" name="TextBox 7"/>
+          <p:cNvSpPr txBox="1"/>
+          <p:nvPr/>
+        </p:nvSpPr>
+        <p:spPr>
+          <a:xfrm>
+            <a:off x="566928" y="932688"/>
+            <a:ext cx="10607040" cy="365760"/>
+          </a:xfrm>
+          <a:prstGeom prst="rect">
+            <a:avLst/>
+          </a:prstGeom>
+          <a:noFill/>
+        </p:spPr>
+        <p:txBody>
+          <a:bodyPr wrap="square" lIns="0" rIns="0" tIns="0" bIns="0">
+            <a:spAutoFit/>
+          </a:bodyPr>
+          <a:lstStyle/>
+          <a:p>
+            <a:pPr algn="l">
+              <a:lnSpc>
+                <a:spcPct val="100000"/>
+              </a:lnSpc>
+            </a:pPr>
+            <a:r>
+              <a:rPr sz="1500" b="1">
+                <a:solidFill>
+                  <a:srgbClr val="0075C2"/>
+                </a:solidFill>
+                <a:latin typeface="Arial"/>
+              </a:rPr>
+              <a:t>Subjective</a:t>
+            </a:r>
+          </a:p>
+        </p:txBody>
+      </p:sp>
+      <p:sp>
+        <p:nvSpPr>
+          <p:cNvPr id="9" name="Rectangle 8"/>
           <p:cNvSpPr/>
           <p:nvPr/>
         </p:nvSpPr>
         <p:spPr>
           <a:xfrm>
-            <a:off x="822960" y="1207008"/>
-            <a:ext cx="1371600" cy="54864"/>
-          </a:xfrm>
-          <a:prstGeom prst="rect">
-            <a:avLst/>
-          </a:prstGeom>
-          <a:gradFill rotWithShape="1">
-            <a:gsLst>
-              <a:gs pos="0">
-                <a:srgbClr val="0075C2"/>
-              </a:gs>
-              <a:gs pos="100000">
-                <a:srgbClr val="00ADA9"/>
-              </a:gs>
-            </a:gsLst>
-            <a:lin scaled="0" ang="0"/>
-          </a:gradFill>
-          <a:ln>
-            <a:noFill/>
+            <a:off x="566928" y="1389888"/>
+            <a:ext cx="5349240" cy="4480560"/>
+          </a:xfrm>
+          <a:prstGeom prst="rect">
+            <a:avLst/>
+          </a:prstGeom>
+          <a:solidFill>
+            <a:srgbClr val="F4F8FD"/>
+          </a:solidFill>
+          <a:ln w="9525">
+            <a:solidFill>
+              <a:srgbClr val="D6E2EE"/>
+            </a:solidFill>
           </a:ln>
         </p:spPr>
         <p:style>
@@ -4326,21 +4862,29 @@
       </p:sp>
       <p:sp>
         <p:nvSpPr>
-          <p:cNvPr id="6" name="Rectangle 5"/>
+          <p:cNvPr id="10" name="Rectangle 9"/>
           <p:cNvSpPr/>
           <p:nvPr/>
         </p:nvSpPr>
         <p:spPr>
           <a:xfrm>
-            <a:off x="822960" y="1783080"/>
-            <a:ext cx="5166360" cy="4023360"/>
-          </a:xfrm>
-          <a:prstGeom prst="rect">
-            <a:avLst/>
-          </a:prstGeom>
-          <a:solidFill>
-            <a:srgbClr val="F4F8FD"/>
-          </a:solidFill>
+            <a:off x="566928" y="1389888"/>
+            <a:ext cx="45720" cy="4480560"/>
+          </a:xfrm>
+          <a:prstGeom prst="rect">
+            <a:avLst/>
+          </a:prstGeom>
+          <a:gradFill rotWithShape="1">
+            <a:gsLst>
+              <a:gs pos="0">
+                <a:srgbClr val="0075C2"/>
+              </a:gs>
+              <a:gs pos="100000">
+                <a:srgbClr val="00ADA9"/>
+              </a:gs>
+            </a:gsLst>
+            <a:lin scaled="0" ang="5400000"/>
+          </a:gradFill>
           <a:ln>
             <a:noFill/>
           </a:ln>
@@ -4369,14 +4913,137 @@
       </p:sp>
       <p:sp>
         <p:nvSpPr>
-          <p:cNvPr id="7" name="Rectangle 6"/>
+          <p:cNvPr id="11" name="TextBox 10"/>
+          <p:cNvSpPr txBox="1"/>
+          <p:nvPr/>
+        </p:nvSpPr>
+        <p:spPr>
+          <a:xfrm>
+            <a:off x="877824" y="1664208"/>
+            <a:ext cx="4754880" cy="365760"/>
+          </a:xfrm>
+          <a:prstGeom prst="rect">
+            <a:avLst/>
+          </a:prstGeom>
+          <a:noFill/>
+        </p:spPr>
+        <p:txBody>
+          <a:bodyPr wrap="square" lIns="0" rIns="0" tIns="0" bIns="0">
+            <a:spAutoFit/>
+          </a:bodyPr>
+          <a:lstStyle/>
+          <a:p>
+            <a:pPr algn="l">
+              <a:lnSpc>
+                <a:spcPct val="100000"/>
+              </a:lnSpc>
+            </a:pPr>
+            <a:r>
+              <a:rPr sz="1700" b="1">
+                <a:solidFill>
+                  <a:srgbClr val="0B2F5B"/>
+                </a:solidFill>
+                <a:latin typeface="Arial"/>
+              </a:rPr>
+              <a:t>Left column</a:t>
+            </a:r>
+          </a:p>
+        </p:txBody>
+      </p:sp>
+      <p:sp>
+        <p:nvSpPr>
+          <p:cNvPr id="12" name="TextBox 11"/>
+          <p:cNvSpPr txBox="1"/>
+          <p:nvPr/>
+        </p:nvSpPr>
+        <p:spPr>
+          <a:xfrm>
+            <a:off x="877824" y="2103120"/>
+            <a:ext cx="4754880" cy="3291840"/>
+          </a:xfrm>
+          <a:prstGeom prst="rect">
+            <a:avLst/>
+          </a:prstGeom>
+          <a:noFill/>
+        </p:spPr>
+        <p:txBody>
+          <a:bodyPr wrap="square" lIns="0" rIns="0" tIns="0" bIns="0">
+            <a:spAutoFit/>
+          </a:bodyPr>
+          <a:lstStyle/>
+          <a:p>
+            <a:pPr algn="l">
+              <a:lnSpc>
+                <a:spcPct val="135000"/>
+              </a:lnSpc>
+            </a:pPr>
+            <a:r>
+              <a:rPr sz="1400" b="0">
+                <a:solidFill>
+                  <a:srgbClr val="5B6F84"/>
+                </a:solidFill>
+                <a:latin typeface="Arial"/>
+              </a:rPr>
+              <a:t>Body text. Replace with a figure, a table or bullets.</a:t>
+            </a:r>
+          </a:p>
+        </p:txBody>
+      </p:sp>
+      <p:sp>
+        <p:nvSpPr>
+          <p:cNvPr id="13" name="Rectangle 12"/>
           <p:cNvSpPr/>
           <p:nvPr/>
         </p:nvSpPr>
         <p:spPr>
           <a:xfrm>
-            <a:off x="822960" y="1783080"/>
-            <a:ext cx="64008" cy="4023360"/>
+            <a:off x="6181344" y="1389888"/>
+            <a:ext cx="5349240" cy="4480560"/>
+          </a:xfrm>
+          <a:prstGeom prst="rect">
+            <a:avLst/>
+          </a:prstGeom>
+          <a:solidFill>
+            <a:srgbClr val="F4F8FD"/>
+          </a:solidFill>
+          <a:ln w="9525">
+            <a:solidFill>
+              <a:srgbClr val="D6E2EE"/>
+            </a:solidFill>
+          </a:ln>
+        </p:spPr>
+        <p:style>
+          <a:lnRef idx="1">
+            <a:schemeClr val="accent1"/>
+          </a:lnRef>
+          <a:fillRef idx="3">
+            <a:schemeClr val="accent1"/>
+          </a:fillRef>
+          <a:effectRef idx="2">
+            <a:schemeClr val="accent1"/>
+          </a:effectRef>
+          <a:fontRef idx="minor">
+            <a:schemeClr val="lt1"/>
+          </a:fontRef>
+        </p:style>
+        <p:txBody>
+          <a:bodyPr rtlCol="0" anchor="ctr"/>
+          <a:lstStyle/>
+          <a:p>
+            <a:pPr algn="ctr"/>
+          </a:p>
+        </p:txBody>
+      </p:sp>
+      <p:sp>
+        <p:nvSpPr>
+          <p:cNvPr id="14" name="Rectangle 13"/>
+          <p:cNvSpPr/>
+          <p:nvPr/>
+        </p:nvSpPr>
+        <p:spPr>
+          <a:xfrm>
+            <a:off x="6181344" y="1389888"/>
+            <a:ext cx="45720" cy="4480560"/>
           </a:xfrm>
           <a:prstGeom prst="rect">
             <a:avLst/>
@@ -4420,14 +5087,14 @@
       </p:sp>
       <p:sp>
         <p:nvSpPr>
-          <p:cNvPr id="8" name="TextBox 7"/>
+          <p:cNvPr id="15" name="TextBox 14"/>
           <p:cNvSpPr txBox="1"/>
           <p:nvPr/>
         </p:nvSpPr>
         <p:spPr>
           <a:xfrm>
-            <a:off x="1207008" y="2103120"/>
-            <a:ext cx="4480560" cy="457200"/>
+            <a:off x="6492240" y="1664208"/>
+            <a:ext cx="4754880" cy="365760"/>
           </a:xfrm>
           <a:prstGeom prst="rect">
             <a:avLst/>
@@ -4440,29 +5107,33 @@
           </a:bodyPr>
           <a:lstStyle/>
           <a:p>
-            <a:pPr algn="l"/>
-            <a:r>
-              <a:rPr sz="2000" b="1">
+            <a:pPr algn="l">
+              <a:lnSpc>
+                <a:spcPct val="100000"/>
+              </a:lnSpc>
+            </a:pPr>
+            <a:r>
+              <a:rPr sz="1700" b="1">
                 <a:solidFill>
                   <a:srgbClr val="0B2F5B"/>
                 </a:solidFill>
-                <a:latin typeface="Noto Sans KR"/>
+                <a:latin typeface="Arial"/>
               </a:rPr>
-              <a:t>Left column</a:t>
-            </a:r>
-          </a:p>
-        </p:txBody>
-      </p:sp>
-      <p:sp>
-        <p:nvSpPr>
-          <p:cNvPr id="9" name="TextBox 8"/>
+              <a:t>Right column</a:t>
+            </a:r>
+          </a:p>
+        </p:txBody>
+      </p:sp>
+      <p:sp>
+        <p:nvSpPr>
+          <p:cNvPr id="16" name="TextBox 15"/>
           <p:cNvSpPr txBox="1"/>
           <p:nvPr/>
         </p:nvSpPr>
         <p:spPr>
           <a:xfrm>
-            <a:off x="1207008" y="2697480"/>
-            <a:ext cx="4480560" cy="2743200"/>
+            <a:off x="6492240" y="2103120"/>
+            <a:ext cx="4754880" cy="3291840"/>
           </a:xfrm>
           <a:prstGeom prst="rect">
             <a:avLst/>
@@ -4475,207 +5146,23 @@
           </a:bodyPr>
           <a:lstStyle/>
           <a:p>
-            <a:pPr algn="l"/>
-            <a:r>
-              <a:rPr sz="1500" b="0">
+            <a:pPr algn="l">
+              <a:lnSpc>
+                <a:spcPct val="135000"/>
+              </a:lnSpc>
+            </a:pPr>
+            <a:r>
+              <a:rPr sz="1400" b="0">
                 <a:solidFill>
                   <a:srgbClr val="5B6F84"/>
                 </a:solidFill>
-                <a:latin typeface="Noto Sans KR"/>
+                <a:latin typeface="Arial"/>
               </a:rPr>
-              <a:t>Body text. Replace with figure, table or bullets.</a:t>
-            </a:r>
-          </a:p>
-        </p:txBody>
-      </p:sp>
-      <p:sp>
-        <p:nvSpPr>
-          <p:cNvPr id="10" name="Rectangle 9"/>
-          <p:cNvSpPr/>
-          <p:nvPr/>
-        </p:nvSpPr>
-        <p:spPr>
-          <a:xfrm>
-            <a:off x="6400800" y="1783080"/>
-            <a:ext cx="5166360" cy="4023360"/>
-          </a:xfrm>
-          <a:prstGeom prst="rect">
-            <a:avLst/>
-          </a:prstGeom>
-          <a:solidFill>
-            <a:srgbClr val="F4F8FD"/>
-          </a:solidFill>
-          <a:ln>
-            <a:noFill/>
-          </a:ln>
-        </p:spPr>
-        <p:style>
-          <a:lnRef idx="1">
-            <a:schemeClr val="accent1"/>
-          </a:lnRef>
-          <a:fillRef idx="3">
-            <a:schemeClr val="accent1"/>
-          </a:fillRef>
-          <a:effectRef idx="2">
-            <a:schemeClr val="accent1"/>
-          </a:effectRef>
-          <a:fontRef idx="minor">
-            <a:schemeClr val="lt1"/>
-          </a:fontRef>
-        </p:style>
-        <p:txBody>
-          <a:bodyPr rtlCol="0" anchor="ctr"/>
-          <a:lstStyle/>
-          <a:p>
-            <a:pPr algn="ctr"/>
-          </a:p>
-        </p:txBody>
-      </p:sp>
-      <p:sp>
-        <p:nvSpPr>
-          <p:cNvPr id="11" name="Rectangle 10"/>
-          <p:cNvSpPr/>
-          <p:nvPr/>
-        </p:nvSpPr>
-        <p:spPr>
-          <a:xfrm>
-            <a:off x="6400800" y="1783080"/>
-            <a:ext cx="64008" cy="4023360"/>
-          </a:xfrm>
-          <a:prstGeom prst="rect">
-            <a:avLst/>
-          </a:prstGeom>
-          <a:gradFill rotWithShape="1">
-            <a:gsLst>
-              <a:gs pos="0">
-                <a:srgbClr val="0075C2"/>
-              </a:gs>
-              <a:gs pos="100000">
-                <a:srgbClr val="00ADA9"/>
-              </a:gs>
-            </a:gsLst>
-            <a:lin scaled="0" ang="5400000"/>
-          </a:gradFill>
-          <a:ln>
-            <a:noFill/>
-          </a:ln>
-        </p:spPr>
-        <p:style>
-          <a:lnRef idx="1">
-            <a:schemeClr val="accent1"/>
-          </a:lnRef>
-          <a:fillRef idx="3">
-            <a:schemeClr val="accent1"/>
-          </a:fillRef>
-          <a:effectRef idx="2">
-            <a:schemeClr val="accent1"/>
-          </a:effectRef>
-          <a:fontRef idx="minor">
-            <a:schemeClr val="lt1"/>
-          </a:fontRef>
-        </p:style>
-        <p:txBody>
-          <a:bodyPr rtlCol="0" anchor="ctr"/>
-          <a:lstStyle/>
-          <a:p>
-            <a:pPr algn="ctr"/>
-          </a:p>
-        </p:txBody>
-      </p:sp>
-      <p:sp>
-        <p:nvSpPr>
-          <p:cNvPr id="12" name="TextBox 11"/>
-          <p:cNvSpPr txBox="1"/>
-          <p:nvPr/>
-        </p:nvSpPr>
-        <p:spPr>
-          <a:xfrm>
-            <a:off x="6784848" y="2103120"/>
-            <a:ext cx="4480560" cy="457200"/>
-          </a:xfrm>
-          <a:prstGeom prst="rect">
-            <a:avLst/>
-          </a:prstGeom>
-          <a:noFill/>
-        </p:spPr>
-        <p:txBody>
-          <a:bodyPr wrap="square" lIns="0" rIns="0" tIns="0" bIns="0">
-            <a:spAutoFit/>
-          </a:bodyPr>
-          <a:lstStyle/>
-          <a:p>
-            <a:pPr algn="l"/>
-            <a:r>
-              <a:rPr sz="2000" b="1">
-                <a:solidFill>
-                  <a:srgbClr val="0B2F5B"/>
-                </a:solidFill>
-                <a:latin typeface="Noto Sans KR"/>
-              </a:rPr>
-              <a:t>Right column</a:t>
-            </a:r>
-          </a:p>
-        </p:txBody>
-      </p:sp>
-      <p:sp>
-        <p:nvSpPr>
-          <p:cNvPr id="13" name="TextBox 12"/>
-          <p:cNvSpPr txBox="1"/>
-          <p:nvPr/>
-        </p:nvSpPr>
-        <p:spPr>
-          <a:xfrm>
-            <a:off x="6784848" y="2697480"/>
-            <a:ext cx="4480560" cy="2743200"/>
-          </a:xfrm>
-          <a:prstGeom prst="rect">
-            <a:avLst/>
-          </a:prstGeom>
-          <a:noFill/>
-        </p:spPr>
-        <p:txBody>
-          <a:bodyPr wrap="square" lIns="0" rIns="0" tIns="0" bIns="0">
-            <a:spAutoFit/>
-          </a:bodyPr>
-          <a:lstStyle/>
-          <a:p>
-            <a:pPr algn="l"/>
-            <a:r>
-              <a:rPr sz="1500" b="0">
-                <a:solidFill>
-                  <a:srgbClr val="5B6F84"/>
-                </a:solidFill>
-                <a:latin typeface="Noto Sans KR"/>
-              </a:rPr>
-              <a:t>Body text. Replace with figure, table or bullets.</a:t>
-            </a:r>
-          </a:p>
-        </p:txBody>
-      </p:sp>
-      <p:pic>
-        <p:nvPicPr>
-          <p:cNvPr id="14" name="Picture 13" descr="ms3l-avatar-circle.png"/>
-          <p:cNvPicPr>
-            <a:picLocks noChangeAspect="1"/>
-          </p:cNvPicPr>
-          <p:nvPr/>
-        </p:nvPicPr>
-        <p:blipFill>
-          <a:blip r:embed="rId2"/>
-          <a:stretch>
-            <a:fillRect/>
-          </a:stretch>
-        </p:blipFill>
-        <p:spPr>
-          <a:xfrm>
-            <a:off x="11356848" y="6053328"/>
-            <a:ext cx="438912" cy="438912"/>
-          </a:xfrm>
-          <a:prstGeom prst="rect">
-            <a:avLst/>
-          </a:prstGeom>
-        </p:spPr>
-      </p:pic>
+              <a:t>Body text. Replace with a figure, a table or bullets.</a:t>
+            </a:r>
+          </a:p>
+        </p:txBody>
+      </p:sp>
     </p:spTree>
   </p:cSld>
   <p:clrMapOvr>
@@ -4694,22 +5181,46 @@
         <p:nvPr/>
       </p:nvGrpSpPr>
       <p:grpSpPr/>
-      <p:sp>
-        <p:nvSpPr>
-          <p:cNvPr id="2" name="Rectangle 1"/>
+      <p:pic>
+        <p:nvPicPr>
+          <p:cNvPr id="2" name="Picture 1" descr="ms3l-avatar-circle.png"/>
+          <p:cNvPicPr>
+            <a:picLocks noChangeAspect="1"/>
+          </p:cNvPicPr>
+          <p:nvPr/>
+        </p:nvPicPr>
+        <p:blipFill>
+          <a:blip r:embed="rId2"/>
+          <a:stretch>
+            <a:fillRect/>
+          </a:stretch>
+        </p:blipFill>
+        <p:spPr>
+          <a:xfrm>
+            <a:off x="10618927" y="219456"/>
+            <a:ext cx="384048" cy="384048"/>
+          </a:xfrm>
+          <a:prstGeom prst="rect">
+            <a:avLst/>
+          </a:prstGeom>
+        </p:spPr>
+      </p:pic>
+      <p:sp>
+        <p:nvSpPr>
+          <p:cNvPr id="3" name="Rectangle 2"/>
           <p:cNvSpPr/>
           <p:nvPr/>
         </p:nvSpPr>
         <p:spPr>
           <a:xfrm>
-            <a:off x="0" y="0"/>
-            <a:ext cx="12191695" cy="6858000"/>
+            <a:off x="11103559" y="256032"/>
+            <a:ext cx="9144" cy="310896"/>
           </a:xfrm>
           <a:prstGeom prst="rect">
             <a:avLst/>
           </a:prstGeom>
           <a:solidFill>
-            <a:srgbClr val="FFFFFF"/>
+            <a:srgbClr val="D6E2EE"/>
           </a:solidFill>
           <a:ln>
             <a:noFill/>
@@ -4737,16 +5248,79 @@
           </a:p>
         </p:txBody>
       </p:sp>
-      <p:sp>
-        <p:nvSpPr>
-          <p:cNvPr id="3" name="Rectangle 2"/>
+      <p:pic>
+        <p:nvPicPr>
+          <p:cNvPr id="4" name="Picture 3" descr="krict-logo.png"/>
+          <p:cNvPicPr>
+            <a:picLocks noChangeAspect="1"/>
+          </p:cNvPicPr>
+          <p:nvPr/>
+        </p:nvPicPr>
+        <p:blipFill>
+          <a:blip r:embed="rId3"/>
+          <a:stretch>
+            <a:fillRect/>
+          </a:stretch>
+        </p:blipFill>
+        <p:spPr>
+          <a:xfrm>
+            <a:off x="11185855" y="292608"/>
+            <a:ext cx="752751" cy="237744"/>
+          </a:xfrm>
+          <a:prstGeom prst="rect">
+            <a:avLst/>
+          </a:prstGeom>
+        </p:spPr>
+      </p:pic>
+      <p:sp>
+        <p:nvSpPr>
+          <p:cNvPr id="5" name="TextBox 4"/>
+          <p:cNvSpPr txBox="1"/>
+          <p:nvPr/>
+        </p:nvSpPr>
+        <p:spPr>
+          <a:xfrm>
+            <a:off x="566928" y="182880"/>
+            <a:ext cx="8595360" cy="548640"/>
+          </a:xfrm>
+          <a:prstGeom prst="rect">
+            <a:avLst/>
+          </a:prstGeom>
+          <a:noFill/>
+        </p:spPr>
+        <p:txBody>
+          <a:bodyPr wrap="square" lIns="0" rIns="0" tIns="0" bIns="0">
+            <a:spAutoFit/>
+          </a:bodyPr>
+          <a:lstStyle/>
+          <a:p>
+            <a:pPr algn="l">
+              <a:lnSpc>
+                <a:spcPct val="100000"/>
+              </a:lnSpc>
+            </a:pPr>
+            <a:r>
+              <a:rPr sz="2800" b="1">
+                <a:solidFill>
+                  <a:srgbClr val="0075C2"/>
+                </a:solidFill>
+                <a:latin typeface="Arial"/>
+              </a:rPr>
+              <a:t>Content #3</a:t>
+            </a:r>
+          </a:p>
+        </p:txBody>
+      </p:sp>
+      <p:sp>
+        <p:nvSpPr>
+          <p:cNvPr id="6" name="Rectangle 5"/>
           <p:cNvSpPr/>
           <p:nvPr/>
         </p:nvSpPr>
         <p:spPr>
           <a:xfrm>
-            <a:off x="0" y="0"/>
-            <a:ext cx="12191695" cy="100584"/>
+            <a:off x="566928" y="749808"/>
+            <a:ext cx="11057839" cy="32004"/>
           </a:xfrm>
           <a:prstGeom prst="rect">
             <a:avLst/>
@@ -4790,14 +5364,14 @@
       </p:sp>
       <p:sp>
         <p:nvSpPr>
-          <p:cNvPr id="4" name="TextBox 3"/>
+          <p:cNvPr id="7" name="TextBox 6"/>
           <p:cNvSpPr txBox="1"/>
           <p:nvPr/>
         </p:nvSpPr>
         <p:spPr>
           <a:xfrm>
-            <a:off x="822960" y="566928"/>
-            <a:ext cx="10058400" cy="640080"/>
+            <a:off x="11002975" y="6382512"/>
+            <a:ext cx="640080" cy="274320"/>
           </a:xfrm>
           <a:prstGeom prst="rect">
             <a:avLst/>
@@ -4810,46 +5384,44 @@
           </a:bodyPr>
           <a:lstStyle/>
           <a:p>
-            <a:pPr algn="l"/>
-            <a:r>
-              <a:rPr sz="3000" b="1">
-                <a:solidFill>
-                  <a:srgbClr val="0B2F5B"/>
-                </a:solidFill>
-                <a:latin typeface="Noto Sans KR"/>
+            <a:pPr algn="r">
+              <a:lnSpc>
+                <a:spcPct val="100000"/>
+              </a:lnSpc>
+            </a:pPr>
+            <a:r>
+              <a:rPr sz="1200" b="0">
+                <a:solidFill>
+                  <a:srgbClr val="5B6F84"/>
+                </a:solidFill>
+                <a:latin typeface="Arial"/>
               </a:rPr>
-              <a:t>Figure</a:t>
-            </a:r>
-          </a:p>
-        </p:txBody>
-      </p:sp>
-      <p:sp>
-        <p:nvSpPr>
-          <p:cNvPr id="5" name="Rectangle 4"/>
+              <a:t>5</a:t>
+            </a:r>
+          </a:p>
+        </p:txBody>
+      </p:sp>
+      <p:sp>
+        <p:nvSpPr>
+          <p:cNvPr id="8" name="Rectangle 7"/>
           <p:cNvSpPr/>
           <p:nvPr/>
         </p:nvSpPr>
         <p:spPr>
           <a:xfrm>
-            <a:off x="822960" y="1207008"/>
-            <a:ext cx="1371600" cy="54864"/>
-          </a:xfrm>
-          <a:prstGeom prst="rect">
-            <a:avLst/>
-          </a:prstGeom>
-          <a:gradFill rotWithShape="1">
-            <a:gsLst>
-              <a:gs pos="0">
-                <a:srgbClr val="0075C2"/>
-              </a:gs>
-              <a:gs pos="100000">
-                <a:srgbClr val="00ADA9"/>
-              </a:gs>
-            </a:gsLst>
-            <a:lin scaled="0" ang="0"/>
-          </a:gradFill>
-          <a:ln>
-            <a:noFill/>
+            <a:off x="566928" y="1188720"/>
+            <a:ext cx="11057839" cy="4572000"/>
+          </a:xfrm>
+          <a:prstGeom prst="rect">
+            <a:avLst/>
+          </a:prstGeom>
+          <a:solidFill>
+            <a:srgbClr val="F4F8FD"/>
+          </a:solidFill>
+          <a:ln w="9525">
+            <a:solidFill>
+              <a:srgbClr val="D6E2EE"/>
+            </a:solidFill>
           </a:ln>
         </p:spPr>
         <p:style>
@@ -4876,59 +5448,14 @@
       </p:sp>
       <p:sp>
         <p:nvSpPr>
-          <p:cNvPr id="6" name="Rectangle 5"/>
-          <p:cNvSpPr/>
-          <p:nvPr/>
-        </p:nvSpPr>
-        <p:spPr>
-          <a:xfrm>
-            <a:off x="822960" y="1783080"/>
-            <a:ext cx="10515600" cy="3977639"/>
-          </a:xfrm>
-          <a:prstGeom prst="rect">
-            <a:avLst/>
-          </a:prstGeom>
-          <a:solidFill>
-            <a:srgbClr val="F4F8FD"/>
-          </a:solidFill>
-          <a:ln w="12700">
-            <a:solidFill>
-              <a:srgbClr val="D6E2EE"/>
-            </a:solidFill>
-          </a:ln>
-        </p:spPr>
-        <p:style>
-          <a:lnRef idx="1">
-            <a:schemeClr val="accent1"/>
-          </a:lnRef>
-          <a:fillRef idx="3">
-            <a:schemeClr val="accent1"/>
-          </a:fillRef>
-          <a:effectRef idx="2">
-            <a:schemeClr val="accent1"/>
-          </a:effectRef>
-          <a:fontRef idx="minor">
-            <a:schemeClr val="lt1"/>
-          </a:fontRef>
-        </p:style>
-        <p:txBody>
-          <a:bodyPr rtlCol="0" anchor="ctr"/>
-          <a:lstStyle/>
-          <a:p>
-            <a:pPr algn="ctr"/>
-          </a:p>
-        </p:txBody>
-      </p:sp>
-      <p:sp>
-        <p:nvSpPr>
-          <p:cNvPr id="7" name="TextBox 6"/>
+          <p:cNvPr id="9" name="TextBox 8"/>
           <p:cNvSpPr txBox="1"/>
           <p:nvPr/>
         </p:nvSpPr>
         <p:spPr>
           <a:xfrm>
-            <a:off x="822960" y="3611880"/>
-            <a:ext cx="10515600" cy="457200"/>
+            <a:off x="566928" y="3310128"/>
+            <a:ext cx="11057839" cy="457200"/>
           </a:xfrm>
           <a:prstGeom prst="rect">
             <a:avLst/>
@@ -4941,13 +5468,17 @@
           </a:bodyPr>
           <a:lstStyle/>
           <a:p>
-            <a:pPr algn="ctr"/>
-            <a:r>
-              <a:rPr sz="1600" b="0">
+            <a:pPr algn="ctr">
+              <a:lnSpc>
+                <a:spcPct val="100000"/>
+              </a:lnSpc>
+            </a:pPr>
+            <a:r>
+              <a:rPr sz="1500" b="0">
                 <a:solidFill>
                   <a:srgbClr val="9AAEC2"/>
                 </a:solidFill>
-                <a:latin typeface="Noto Sans KR"/>
+                <a:latin typeface="Arial"/>
               </a:rPr>
               <a:t>Place figure here</a:t>
             </a:r>
@@ -4956,14 +5487,14 @@
       </p:sp>
       <p:sp>
         <p:nvSpPr>
-          <p:cNvPr id="8" name="TextBox 7"/>
+          <p:cNvPr id="10" name="TextBox 9"/>
           <p:cNvSpPr txBox="1"/>
           <p:nvPr/>
         </p:nvSpPr>
         <p:spPr>
           <a:xfrm>
-            <a:off x="822960" y="5897880"/>
-            <a:ext cx="10515600" cy="365760"/>
+            <a:off x="566928" y="5888736"/>
+            <a:ext cx="11057839" cy="365760"/>
           </a:xfrm>
           <a:prstGeom prst="rect">
             <a:avLst/>
@@ -4976,13 +5507,17 @@
           </a:bodyPr>
           <a:lstStyle/>
           <a:p>
-            <a:pPr algn="l"/>
-            <a:r>
-              <a:rPr sz="1300" b="0">
+            <a:pPr algn="l">
+              <a:lnSpc>
+                <a:spcPct val="100000"/>
+              </a:lnSpc>
+            </a:pPr>
+            <a:r>
+              <a:rPr sz="1200" b="0">
                 <a:solidFill>
                   <a:srgbClr val="5B6F84"/>
                 </a:solidFill>
-                <a:latin typeface="Noto Sans KR"/>
+                <a:latin typeface="Arial"/>
               </a:rPr>
               <a:t>Figure 1. Caption.</a:t>
             </a:r>
@@ -5007,31 +5542,47 @@
         <p:nvPr/>
       </p:nvGrpSpPr>
       <p:grpSpPr/>
-      <p:sp>
-        <p:nvSpPr>
-          <p:cNvPr id="2" name="Rectangle 1"/>
+      <p:pic>
+        <p:nvPicPr>
+          <p:cNvPr id="2" name="Picture 1" descr="ms3l-avatar-circle.png"/>
+          <p:cNvPicPr>
+            <a:picLocks noChangeAspect="1"/>
+          </p:cNvPicPr>
+          <p:nvPr/>
+        </p:nvPicPr>
+        <p:blipFill>
+          <a:blip r:embed="rId2"/>
+          <a:stretch>
+            <a:fillRect/>
+          </a:stretch>
+        </p:blipFill>
+        <p:spPr>
+          <a:xfrm>
+            <a:off x="10618927" y="219456"/>
+            <a:ext cx="384048" cy="384048"/>
+          </a:xfrm>
+          <a:prstGeom prst="rect">
+            <a:avLst/>
+          </a:prstGeom>
+        </p:spPr>
+      </p:pic>
+      <p:sp>
+        <p:nvSpPr>
+          <p:cNvPr id="3" name="Rectangle 2"/>
           <p:cNvSpPr/>
           <p:nvPr/>
         </p:nvSpPr>
         <p:spPr>
           <a:xfrm>
-            <a:off x="0" y="0"/>
-            <a:ext cx="12191695" cy="6858000"/>
-          </a:xfrm>
-          <a:prstGeom prst="rect">
-            <a:avLst/>
-          </a:prstGeom>
-          <a:gradFill rotWithShape="1">
-            <a:gsLst>
-              <a:gs pos="0">
-                <a:srgbClr val="0075C2"/>
-              </a:gs>
-              <a:gs pos="100000">
-                <a:srgbClr val="00ADA9"/>
-              </a:gs>
-            </a:gsLst>
-            <a:lin scaled="0" ang="2700000"/>
-          </a:gradFill>
+            <a:off x="11103559" y="256032"/>
+            <a:ext cx="9144" cy="310896"/>
+          </a:xfrm>
+          <a:prstGeom prst="rect">
+            <a:avLst/>
+          </a:prstGeom>
+          <a:solidFill>
+            <a:srgbClr val="D6E2EE"/>
+          </a:solidFill>
           <a:ln>
             <a:noFill/>
           </a:ln>
@@ -5060,22 +5611,22 @@
       </p:sp>
       <p:pic>
         <p:nvPicPr>
-          <p:cNvPr id="3" name="Picture 2" descr="ms3l-avatar-circle.png"/>
+          <p:cNvPr id="4" name="Picture 3" descr="krict-logo.png"/>
           <p:cNvPicPr>
             <a:picLocks noChangeAspect="1"/>
           </p:cNvPicPr>
           <p:nvPr/>
         </p:nvPicPr>
         <p:blipFill>
-          <a:blip r:embed="rId2"/>
+          <a:blip r:embed="rId3"/>
           <a:stretch>
             <a:fillRect/>
           </a:stretch>
         </p:blipFill>
         <p:spPr>
           <a:xfrm>
-            <a:off x="5541264" y="1600200"/>
-            <a:ext cx="1463040" cy="1463040"/>
+            <a:off x="11185855" y="292608"/>
+            <a:ext cx="752751" cy="237744"/>
           </a:xfrm>
           <a:prstGeom prst="rect">
             <a:avLst/>
@@ -5084,14 +5635,14 @@
       </p:pic>
       <p:sp>
         <p:nvSpPr>
-          <p:cNvPr id="4" name="TextBox 3"/>
+          <p:cNvPr id="5" name="TextBox 4"/>
           <p:cNvSpPr txBox="1"/>
           <p:nvPr/>
         </p:nvSpPr>
         <p:spPr>
           <a:xfrm>
-            <a:off x="914400" y="3520440"/>
-            <a:ext cx="10332720" cy="731520"/>
+            <a:off x="566928" y="182880"/>
+            <a:ext cx="8595360" cy="548640"/>
           </a:xfrm>
           <a:prstGeom prst="rect">
             <a:avLst/>
@@ -5104,29 +5655,84 @@
           </a:bodyPr>
           <a:lstStyle/>
           <a:p>
+            <a:pPr algn="l">
+              <a:lnSpc>
+                <a:spcPct val="100000"/>
+              </a:lnSpc>
+            </a:pPr>
+            <a:r>
+              <a:rPr sz="2800" b="1">
+                <a:solidFill>
+                  <a:srgbClr val="0075C2"/>
+                </a:solidFill>
+                <a:latin typeface="Arial"/>
+              </a:rPr>
+              <a:t>Conclusions</a:t>
+            </a:r>
+          </a:p>
+        </p:txBody>
+      </p:sp>
+      <p:sp>
+        <p:nvSpPr>
+          <p:cNvPr id="6" name="Rectangle 5"/>
+          <p:cNvSpPr/>
+          <p:nvPr/>
+        </p:nvSpPr>
+        <p:spPr>
+          <a:xfrm>
+            <a:off x="566928" y="749808"/>
+            <a:ext cx="11057839" cy="32004"/>
+          </a:xfrm>
+          <a:prstGeom prst="rect">
+            <a:avLst/>
+          </a:prstGeom>
+          <a:gradFill rotWithShape="1">
+            <a:gsLst>
+              <a:gs pos="0">
+                <a:srgbClr val="0075C2"/>
+              </a:gs>
+              <a:gs pos="100000">
+                <a:srgbClr val="00ADA9"/>
+              </a:gs>
+            </a:gsLst>
+            <a:lin scaled="0" ang="0"/>
+          </a:gradFill>
+          <a:ln>
+            <a:noFill/>
+          </a:ln>
+        </p:spPr>
+        <p:style>
+          <a:lnRef idx="1">
+            <a:schemeClr val="accent1"/>
+          </a:lnRef>
+          <a:fillRef idx="3">
+            <a:schemeClr val="accent1"/>
+          </a:fillRef>
+          <a:effectRef idx="2">
+            <a:schemeClr val="accent1"/>
+          </a:effectRef>
+          <a:fontRef idx="minor">
+            <a:schemeClr val="lt1"/>
+          </a:fontRef>
+        </p:style>
+        <p:txBody>
+          <a:bodyPr rtlCol="0" anchor="ctr"/>
+          <a:lstStyle/>
+          <a:p>
             <a:pPr algn="ctr"/>
-            <a:r>
-              <a:rPr sz="4000" b="1">
-                <a:solidFill>
-                  <a:srgbClr val="FFFFFF"/>
-                </a:solidFill>
-                <a:latin typeface="Noto Sans KR"/>
-              </a:rPr>
-              <a:t>Thank you</a:t>
-            </a:r>
-          </a:p>
-        </p:txBody>
-      </p:sp>
-      <p:sp>
-        <p:nvSpPr>
-          <p:cNvPr id="5" name="TextBox 4"/>
+          </a:p>
+        </p:txBody>
+      </p:sp>
+      <p:sp>
+        <p:nvSpPr>
+          <p:cNvPr id="7" name="TextBox 6"/>
           <p:cNvSpPr txBox="1"/>
           <p:nvPr/>
         </p:nvSpPr>
         <p:spPr>
           <a:xfrm>
-            <a:off x="914400" y="4407408"/>
-            <a:ext cx="10332720" cy="365760"/>
+            <a:off x="11002975" y="6382512"/>
+            <a:ext cx="640080" cy="274320"/>
           </a:xfrm>
           <a:prstGeom prst="rect">
             <a:avLst/>
@@ -5139,29 +5745,33 @@
           </a:bodyPr>
           <a:lstStyle/>
           <a:p>
-            <a:pPr algn="ctr"/>
-            <a:r>
-              <a:rPr sz="1600" b="0">
-                <a:solidFill>
-                  <a:srgbClr val="D8EFF6"/>
-                </a:solidFill>
-                <a:latin typeface="Noto Sans KR"/>
+            <a:pPr algn="r">
+              <a:lnSpc>
+                <a:spcPct val="100000"/>
+              </a:lnSpc>
+            </a:pPr>
+            <a:r>
+              <a:rPr sz="1200" b="0">
+                <a:solidFill>
+                  <a:srgbClr val="5B6F84"/>
+                </a:solidFill>
+                <a:latin typeface="Arial"/>
               </a:rPr>
-              <a:t>jh.kim@krict.re.kr</a:t>
-            </a:r>
-          </a:p>
-        </p:txBody>
-      </p:sp>
-      <p:sp>
-        <p:nvSpPr>
-          <p:cNvPr id="6" name="TextBox 5"/>
+              <a:t>6</a:t>
+            </a:r>
+          </a:p>
+        </p:txBody>
+      </p:sp>
+      <p:sp>
+        <p:nvSpPr>
+          <p:cNvPr id="8" name="TextBox 7"/>
           <p:cNvSpPr txBox="1"/>
           <p:nvPr/>
         </p:nvSpPr>
         <p:spPr>
           <a:xfrm>
-            <a:off x="914400" y="4800600"/>
-            <a:ext cx="10332720" cy="365760"/>
+            <a:off x="621792" y="1280160"/>
+            <a:ext cx="292608" cy="310896"/>
           </a:xfrm>
           <a:prstGeom prst="rect">
             <a:avLst/>
@@ -5174,15 +5784,253 @@
           </a:bodyPr>
           <a:lstStyle/>
           <a:p>
-            <a:pPr algn="ctr"/>
-            <a:r>
-              <a:rPr sz="1500" b="0">
-                <a:solidFill>
-                  <a:srgbClr val="B2E2E0"/>
-                </a:solidFill>
-                <a:latin typeface="Noto Sans KR"/>
+            <a:pPr algn="l">
+              <a:lnSpc>
+                <a:spcPct val="100000"/>
+              </a:lnSpc>
+            </a:pPr>
+            <a:r>
+              <a:rPr sz="1800" b="1">
+                <a:solidFill>
+                  <a:srgbClr val="00ADA9"/>
+                </a:solidFill>
+                <a:latin typeface="Arial"/>
               </a:rPr>
-              <a:t>https://ms3l.org</a:t>
+              <a:t>✓</a:t>
+            </a:r>
+          </a:p>
+        </p:txBody>
+      </p:sp>
+      <p:sp>
+        <p:nvSpPr>
+          <p:cNvPr id="9" name="TextBox 8"/>
+          <p:cNvSpPr txBox="1"/>
+          <p:nvPr/>
+        </p:nvSpPr>
+        <p:spPr>
+          <a:xfrm>
+            <a:off x="932688" y="1280160"/>
+            <a:ext cx="10607040" cy="310896"/>
+          </a:xfrm>
+          <a:prstGeom prst="rect">
+            <a:avLst/>
+          </a:prstGeom>
+          <a:noFill/>
+        </p:spPr>
+        <p:txBody>
+          <a:bodyPr wrap="square" lIns="0" rIns="0" tIns="0" bIns="0">
+            <a:spAutoFit/>
+          </a:bodyPr>
+          <a:lstStyle/>
+          <a:p>
+            <a:pPr algn="l">
+              <a:lnSpc>
+                <a:spcPct val="100000"/>
+              </a:lnSpc>
+            </a:pPr>
+            <a:r>
+              <a:rPr sz="1800" b="1">
+                <a:solidFill>
+                  <a:srgbClr val="0B2F5B"/>
+                </a:solidFill>
+                <a:latin typeface="Arial"/>
+              </a:rPr>
+              <a:t>Summary point one</a:t>
+            </a:r>
+          </a:p>
+        </p:txBody>
+      </p:sp>
+      <p:sp>
+        <p:nvSpPr>
+          <p:cNvPr id="10" name="TextBox 9"/>
+          <p:cNvSpPr txBox="1"/>
+          <p:nvPr/>
+        </p:nvSpPr>
+        <p:spPr>
+          <a:xfrm>
+            <a:off x="621792" y="1993392"/>
+            <a:ext cx="292608" cy="310896"/>
+          </a:xfrm>
+          <a:prstGeom prst="rect">
+            <a:avLst/>
+          </a:prstGeom>
+          <a:noFill/>
+        </p:spPr>
+        <p:txBody>
+          <a:bodyPr wrap="square" lIns="0" rIns="0" tIns="0" bIns="0">
+            <a:spAutoFit/>
+          </a:bodyPr>
+          <a:lstStyle/>
+          <a:p>
+            <a:pPr algn="l">
+              <a:lnSpc>
+                <a:spcPct val="100000"/>
+              </a:lnSpc>
+            </a:pPr>
+            <a:r>
+              <a:rPr sz="1800" b="1">
+                <a:solidFill>
+                  <a:srgbClr val="00ADA9"/>
+                </a:solidFill>
+                <a:latin typeface="Arial"/>
+              </a:rPr>
+              <a:t>✓</a:t>
+            </a:r>
+          </a:p>
+        </p:txBody>
+      </p:sp>
+      <p:sp>
+        <p:nvSpPr>
+          <p:cNvPr id="11" name="TextBox 10"/>
+          <p:cNvSpPr txBox="1"/>
+          <p:nvPr/>
+        </p:nvSpPr>
+        <p:spPr>
+          <a:xfrm>
+            <a:off x="932688" y="1993392"/>
+            <a:ext cx="10607040" cy="310896"/>
+          </a:xfrm>
+          <a:prstGeom prst="rect">
+            <a:avLst/>
+          </a:prstGeom>
+          <a:noFill/>
+        </p:spPr>
+        <p:txBody>
+          <a:bodyPr wrap="square" lIns="0" rIns="0" tIns="0" bIns="0">
+            <a:spAutoFit/>
+          </a:bodyPr>
+          <a:lstStyle/>
+          <a:p>
+            <a:pPr algn="l">
+              <a:lnSpc>
+                <a:spcPct val="100000"/>
+              </a:lnSpc>
+            </a:pPr>
+            <a:r>
+              <a:rPr sz="1800" b="1">
+                <a:solidFill>
+                  <a:srgbClr val="0B2F5B"/>
+                </a:solidFill>
+                <a:latin typeface="Arial"/>
+              </a:rPr>
+              <a:t>Summary point two</a:t>
+            </a:r>
+          </a:p>
+        </p:txBody>
+      </p:sp>
+      <p:sp>
+        <p:nvSpPr>
+          <p:cNvPr id="12" name="TextBox 11"/>
+          <p:cNvSpPr txBox="1"/>
+          <p:nvPr/>
+        </p:nvSpPr>
+        <p:spPr>
+          <a:xfrm>
+            <a:off x="621792" y="2706624"/>
+            <a:ext cx="292608" cy="310896"/>
+          </a:xfrm>
+          <a:prstGeom prst="rect">
+            <a:avLst/>
+          </a:prstGeom>
+          <a:noFill/>
+        </p:spPr>
+        <p:txBody>
+          <a:bodyPr wrap="square" lIns="0" rIns="0" tIns="0" bIns="0">
+            <a:spAutoFit/>
+          </a:bodyPr>
+          <a:lstStyle/>
+          <a:p>
+            <a:pPr algn="l">
+              <a:lnSpc>
+                <a:spcPct val="100000"/>
+              </a:lnSpc>
+            </a:pPr>
+            <a:r>
+              <a:rPr sz="1800" b="1">
+                <a:solidFill>
+                  <a:srgbClr val="00ADA9"/>
+                </a:solidFill>
+                <a:latin typeface="Arial"/>
+              </a:rPr>
+              <a:t>✓</a:t>
+            </a:r>
+          </a:p>
+        </p:txBody>
+      </p:sp>
+      <p:sp>
+        <p:nvSpPr>
+          <p:cNvPr id="13" name="TextBox 12"/>
+          <p:cNvSpPr txBox="1"/>
+          <p:nvPr/>
+        </p:nvSpPr>
+        <p:spPr>
+          <a:xfrm>
+            <a:off x="932688" y="2706624"/>
+            <a:ext cx="10607040" cy="310896"/>
+          </a:xfrm>
+          <a:prstGeom prst="rect">
+            <a:avLst/>
+          </a:prstGeom>
+          <a:noFill/>
+        </p:spPr>
+        <p:txBody>
+          <a:bodyPr wrap="square" lIns="0" rIns="0" tIns="0" bIns="0">
+            <a:spAutoFit/>
+          </a:bodyPr>
+          <a:lstStyle/>
+          <a:p>
+            <a:pPr algn="l">
+              <a:lnSpc>
+                <a:spcPct val="100000"/>
+              </a:lnSpc>
+            </a:pPr>
+            <a:r>
+              <a:rPr sz="1800" b="1">
+                <a:solidFill>
+                  <a:srgbClr val="0B2F5B"/>
+                </a:solidFill>
+                <a:latin typeface="Arial"/>
+              </a:rPr>
+              <a:t>Summary point three</a:t>
+            </a:r>
+          </a:p>
+        </p:txBody>
+      </p:sp>
+      <p:sp>
+        <p:nvSpPr>
+          <p:cNvPr id="14" name="TextBox 13"/>
+          <p:cNvSpPr txBox="1"/>
+          <p:nvPr/>
+        </p:nvSpPr>
+        <p:spPr>
+          <a:xfrm>
+            <a:off x="566928" y="5138928"/>
+            <a:ext cx="10607040" cy="365760"/>
+          </a:xfrm>
+          <a:prstGeom prst="rect">
+            <a:avLst/>
+          </a:prstGeom>
+          <a:noFill/>
+        </p:spPr>
+        <p:txBody>
+          <a:bodyPr wrap="square" lIns="0" rIns="0" tIns="0" bIns="0">
+            <a:spAutoFit/>
+          </a:bodyPr>
+          <a:lstStyle/>
+          <a:p>
+            <a:pPr algn="l">
+              <a:lnSpc>
+                <a:spcPct val="100000"/>
+              </a:lnSpc>
+            </a:pPr>
+            <a:r>
+              <a:rPr sz="1400" b="0">
+                <a:solidFill>
+                  <a:srgbClr val="0075C2"/>
+                </a:solidFill>
+                <a:latin typeface="Arial"/>
+              </a:rPr>
+              <a:t>jh.kim@krict.re.kr    |    https://ms3l.org</a:t>
             </a:r>
           </a:p>
         </p:txBody>
